--- a/ibm-pitch/IBM_Pitch_Where_Is_The_Money.pptx
+++ b/ibm-pitch/IBM_Pitch_Where_Is_The_Money.pptx
@@ -18,9 +18,11 @@
     <p:sldId id="266" r:id="rId12"/>
     <p:sldId id="267" r:id="rId13"/>
     <p:sldId id="268" r:id="rId14"/>
+    <p:sldId id="269" r:id="rId15"/>
+    <p:sldId id="270" r:id="rId16"/>
   </p:sldIdLst>
   <p:notesMasterIdLst>
-    <p:notesMasterId r:id="rId15"/>
+    <p:notesMasterId r:id="rId17"/>
   </p:notesMasterIdLst>
   <p:sldSz cx="12192000" cy="6858000"/>
   <p:notesSz cx="6858000" cy="12192000"/>
@@ -119,41 +121,43 @@
   <p:extLst>
     <p:ext uri="{521415D9-36F7-43E2-AB2F-B90AF26B5E84}">
       <p14:sectionLst xmlns:p14="http://schemas.microsoft.com/office/powerpoint/2010/main">
-        <p14:section name="פתיחה" id="{f7eca6f4-292c-5044-137d-8e84380d3864}">
+        <p14:section name="פתיחה" id="{d8f832df-a32b-ec0d-8607-322285a58e63}">
           <p14:sldIdLst>
             <p14:sldId id="256"/>
           </p14:sldIdLst>
         </p14:section>
-        <p14:section name="הבעיה" id="{c49a61c5-fb8a-dd17-e83d-fa5922b31d86}">
+        <p14:section name="הבעיה" id="{9a111b3d-67f6-dadf-aadf-e103ee88b11f}">
           <p14:sldIdLst>
             <p14:sldId id="257"/>
             <p14:sldId id="258"/>
           </p14:sldIdLst>
         </p14:section>
-        <p14:section name="הפתרון" id="{61310519-d4e1-1aa6-faa3-aca00acd2205}">
+        <p14:section name="הפתרון" id="{c515a890-45f8-767b-c561-c89a71fa1172}">
           <p14:sldIdLst>
             <p14:sldId id="259"/>
             <p14:sldId id="260"/>
             <p14:sldId id="261"/>
           </p14:sldIdLst>
         </p14:section>
-        <p14:section name="ערך ושוק" id="{64952a1e-f52c-0c4d-a109-e4676ab640a0}">
+        <p14:section name="ערך ושוק" id="{0fd27cfb-63b6-446f-b33b-f84c3483f6b0}">
           <p14:sldIdLst>
             <p14:sldId id="262"/>
             <p14:sldId id="263"/>
             <p14:sldId id="264"/>
           </p14:sldIdLst>
         </p14:section>
-        <p14:section name="ביצוע" id="{ac39bb7e-bc85-b81e-0551-5f9bf6a2811a}">
+        <p14:section name="ביצוע" id="{d106c946-8135-ae00-20d6-fdf69bfac148}">
           <p14:sldIdLst>
             <p14:sldId id="265"/>
             <p14:sldId id="266"/>
             <p14:sldId id="267"/>
+            <p14:sldId id="268"/>
+            <p14:sldId id="269"/>
           </p14:sldIdLst>
         </p14:section>
-        <p14:section name="סיכום" id="{9bb29d2a-179a-b53b-4397-5c95909abc0f}">
+        <p14:section name="סיכום" id="{2d369520-8cbd-e83f-0f67-d7917015488a}">
           <p14:sldIdLst>
-            <p14:sldId id="268"/>
+            <p14:sldId id="270"/>
           </p14:sldIdLst>
         </p14:section>
       </p14:sectionLst>
@@ -906,7 +910,7 @@
           <a:p>
             <a:r>
               <a:rPr lang="en-US" dirty="0"/>
-              <a:t>משתלבים בכלים ש-IBM כבר מוכרת ללקוחות ארגוניים: Apptio, Turbonomic ו-Envizi, עם watsonx כשכבת ה-AI והממשל.</a:t>
+              <a:t>שלוש שכבות IBM: קטלוג הנתונים (watsonx.data intelligence / Knowledge Catalog) נותן מקור אמת אחד עם הרשאות ומיסוך; watsonx Orchestrate מנהל את הסוכנים; watsonx.governance מתעד ומבקר. IBM Bob הוא כלי הפיתוח שבעזרתו בונים את כל זה.</a:t>
             </a:r>
             <a:endParaRPr lang="en-US" dirty="0"/>
           </a:p>
@@ -994,7 +998,7 @@
           <a:p>
             <a:r>
               <a:rPr lang="en-US" dirty="0"/>
-              <a:t>מתחילים בתחומים שבהם הנתונים זמינים והחיסכון מהיר (כלים, חשמל), ורק אחר כך מנוע האנשים — הרגיש יותר.</a:t>
+              <a:t>הסוכנים עובדים במקביל. שום פעולה לא מתבצעת אוטומטית בלי אישור המנהל — חשוב במיוחד בהמלצות שנוגעות לעובדים.</a:t>
             </a:r>
             <a:endParaRPr lang="en-US" dirty="0"/>
           </a:p>
@@ -1082,7 +1086,7 @@
           <a:p>
             <a:r>
               <a:rPr lang="en-US" dirty="0"/>
-              <a:t>השלימו שמות, תפקידים וניסיון של חברי הצוות.</a:t>
+              <a:t>IBM Bob הוא שותף הפיתוח מבוסס ה-AI של IBM (זמין מאפריל 2026). אנחנו משתמשים בו כדי לבנות את המחברים והסוכנים מהר, ובזכות בקרות האבטחה המובנות שלו — לטפל בנתוני עובדים באחריות. נתון ה-45% הוא נתון של IBM עצמה.</a:t>
             </a:r>
             <a:endParaRPr lang="en-US" dirty="0"/>
           </a:p>
@@ -1170,7 +1174,7 @@
           <a:p>
             <a:r>
               <a:rPr lang="en-US" dirty="0"/>
-              <a:t>סיום: הבקשה הקונקרטית, ומשפט הסיום שחוזר על ההבטחה המרכזית.</a:t>
+              <a:t>מתחילים בתחומים שבהם הנתונים זמינים והחיסכון מהיר (כלים, חשמל), ורק אחר כך מנוע האנשים — הרגיש יותר.</a:t>
             </a:r>
             <a:endParaRPr lang="en-US" dirty="0"/>
           </a:p>
@@ -1194,6 +1198,182 @@
             <a:fld id="{F7021451-1387-4CA6-816F-3879F97B5CBC}" type="slidenum">
               <a:rPr lang="en-US"/>
               <a:t>13</a:t>
+            </a:fld>
+            <a:endParaRPr lang="en-US"/>
+          </a:p>
+        </p:txBody>
+      </p:sp>
+    </p:spTree>
+    <p:extLst>
+      <p:ext uri="{BB962C8B-B14F-4D97-AF65-F5344CB8AC3E}">
+        <p14:creationId xmlns:p14="http://schemas.microsoft.com/office/powerpoint/2010/main" val="1024086991"/>
+      </p:ext>
+    </p:extLst>
+  </p:cSld>
+  <p:clrMapOvr>
+    <a:masterClrMapping/>
+  </p:clrMapOvr>
+</p:notes>
+</file>
+
+<file path=ppt/notesSlides/notesSlide14.xml><?xml version="1.0" encoding="utf-8"?>
+<p:notes xmlns:a="http://schemas.openxmlformats.org/drawingml/2006/main" xmlns:r="http://schemas.openxmlformats.org/officeDocument/2006/relationships" xmlns:p="http://schemas.openxmlformats.org/presentationml/2006/main">
+  <p:cSld>
+    <p:spTree>
+      <p:nvGrpSpPr>
+        <p:cNvPr id="1" name=""/>
+        <p:cNvGrpSpPr/>
+        <p:nvPr/>
+      </p:nvGrpSpPr>
+      <p:grpSpPr>
+        <a:xfrm>
+          <a:off x="0" y="0"/>
+          <a:ext cx="0" cy="0"/>
+          <a:chOff x="0" y="0"/>
+          <a:chExt cx="0" cy="0"/>
+        </a:xfrm>
+      </p:grpSpPr>
+      <p:sp>
+        <p:nvSpPr>
+          <p:cNvPr id="2" name="Slide Image Placeholder 1"/>
+          <p:cNvSpPr>
+            <a:spLocks noGrp="1" noRot="1" noChangeAspect="1"/>
+          </p:cNvSpPr>
+          <p:nvPr>
+            <p:ph type="sldImg"/>
+          </p:nvPr>
+        </p:nvSpPr>
+        <p:spPr/>
+      </p:sp>
+      <p:sp>
+        <p:nvSpPr>
+          <p:cNvPr id="3" name="Notes Placeholder 2"/>
+          <p:cNvSpPr>
+            <a:spLocks noGrp="1"/>
+          </p:cNvSpPr>
+          <p:nvPr>
+            <p:ph type="body" idx="1"/>
+          </p:nvPr>
+        </p:nvSpPr>
+        <p:spPr/>
+        <p:txBody>
+          <a:bodyPr/>
+          <a:lstStyle/>
+          <a:p>
+            <a:r>
+              <a:rPr lang="en-US" dirty="0"/>
+              <a:t>השלימו שמות, תפקידים וניסיון של חברי הצוות.</a:t>
+            </a:r>
+            <a:endParaRPr lang="en-US" dirty="0"/>
+          </a:p>
+        </p:txBody>
+      </p:sp>
+      <p:sp>
+        <p:nvSpPr>
+          <p:cNvPr id="4" name="Slide Number Placeholder 3"/>
+          <p:cNvSpPr>
+            <a:spLocks noGrp="1"/>
+          </p:cNvSpPr>
+          <p:nvPr>
+            <p:ph type="sldNum" sz="quarter" idx="10"/>
+          </p:nvPr>
+        </p:nvSpPr>
+        <p:spPr/>
+        <p:txBody>
+          <a:bodyPr/>
+          <a:lstStyle/>
+          <a:p>
+            <a:fld id="{F7021451-1387-4CA6-816F-3879F97B5CBC}" type="slidenum">
+              <a:rPr lang="en-US"/>
+              <a:t>14</a:t>
+            </a:fld>
+            <a:endParaRPr lang="en-US"/>
+          </a:p>
+        </p:txBody>
+      </p:sp>
+    </p:spTree>
+    <p:extLst>
+      <p:ext uri="{BB962C8B-B14F-4D97-AF65-F5344CB8AC3E}">
+        <p14:creationId xmlns:p14="http://schemas.microsoft.com/office/powerpoint/2010/main" val="1024086991"/>
+      </p:ext>
+    </p:extLst>
+  </p:cSld>
+  <p:clrMapOvr>
+    <a:masterClrMapping/>
+  </p:clrMapOvr>
+</p:notes>
+</file>
+
+<file path=ppt/notesSlides/notesSlide15.xml><?xml version="1.0" encoding="utf-8"?>
+<p:notes xmlns:a="http://schemas.openxmlformats.org/drawingml/2006/main" xmlns:r="http://schemas.openxmlformats.org/officeDocument/2006/relationships" xmlns:p="http://schemas.openxmlformats.org/presentationml/2006/main">
+  <p:cSld>
+    <p:spTree>
+      <p:nvGrpSpPr>
+        <p:cNvPr id="1" name=""/>
+        <p:cNvGrpSpPr/>
+        <p:nvPr/>
+      </p:nvGrpSpPr>
+      <p:grpSpPr>
+        <a:xfrm>
+          <a:off x="0" y="0"/>
+          <a:ext cx="0" cy="0"/>
+          <a:chOff x="0" y="0"/>
+          <a:chExt cx="0" cy="0"/>
+        </a:xfrm>
+      </p:grpSpPr>
+      <p:sp>
+        <p:nvSpPr>
+          <p:cNvPr id="2" name="Slide Image Placeholder 1"/>
+          <p:cNvSpPr>
+            <a:spLocks noGrp="1" noRot="1" noChangeAspect="1"/>
+          </p:cNvSpPr>
+          <p:nvPr>
+            <p:ph type="sldImg"/>
+          </p:nvPr>
+        </p:nvSpPr>
+        <p:spPr/>
+      </p:sp>
+      <p:sp>
+        <p:nvSpPr>
+          <p:cNvPr id="3" name="Notes Placeholder 2"/>
+          <p:cNvSpPr>
+            <a:spLocks noGrp="1"/>
+          </p:cNvSpPr>
+          <p:nvPr>
+            <p:ph type="body" idx="1"/>
+          </p:nvPr>
+        </p:nvSpPr>
+        <p:spPr/>
+        <p:txBody>
+          <a:bodyPr/>
+          <a:lstStyle/>
+          <a:p>
+            <a:r>
+              <a:rPr lang="en-US" dirty="0"/>
+              <a:t>סיום: הבקשה הקונקרטית, ומשפט הסיום שחוזר על ההבטחה המרכזית.</a:t>
+            </a:r>
+            <a:endParaRPr lang="en-US" dirty="0"/>
+          </a:p>
+        </p:txBody>
+      </p:sp>
+      <p:sp>
+        <p:nvSpPr>
+          <p:cNvPr id="4" name="Slide Number Placeholder 3"/>
+          <p:cNvSpPr>
+            <a:spLocks noGrp="1"/>
+          </p:cNvSpPr>
+          <p:nvPr>
+            <p:ph type="sldNum" sz="quarter" idx="10"/>
+          </p:nvPr>
+        </p:nvSpPr>
+        <p:spPr/>
+        <p:txBody>
+          <a:bodyPr/>
+          <a:lstStyle/>
+          <a:p>
+            <a:fld id="{F7021451-1387-4CA6-816F-3879F97B5CBC}" type="slidenum">
+              <a:rPr lang="en-US"/>
+              <a:t>15</a:t>
             </a:fld>
             <a:endParaRPr lang="en-US"/>
           </a:p>
@@ -2767,7 +2947,7 @@
                   <a:schemeClr val="tx2"/>
                 </a:solidFill>
               </a:rPr>
-              <a:t>בנוי על טכנולוגיות IBM</a:t>
+              <a:t>הארכיטקטורה: קטלוג נתונים ← אורקסטרציה ← פעולה</a:t>
             </a:r>
             <a:endParaRPr lang="he-IL" sz="3200" dirty="0"/>
           </a:p>
@@ -2781,12 +2961,12 @@
         </p:nvSpPr>
         <p:spPr>
           <a:xfrm>
-            <a:off x="8351215" y="1463040"/>
-            <a:ext cx="3291840" cy="4480560"/>
+            <a:off x="9128455" y="1417320"/>
+            <a:ext cx="2514600" cy="3794760"/>
           </a:xfrm>
           <a:prstGeom prst="roundRect">
             <a:avLst>
-              <a:gd name="adj" fmla="val 3333"/>
+              <a:gd name="adj" fmla="val 4364"/>
             </a:avLst>
           </a:prstGeom>
           <a:solidFill>
@@ -2808,8 +2988,8 @@
         </p:nvSpPr>
         <p:spPr>
           <a:xfrm>
-            <a:off x="8579815" y="1645920"/>
-            <a:ext cx="2834640" cy="548640"/>
+            <a:off x="9311335" y="1554480"/>
+            <a:ext cx="2148840" cy="457200"/>
           </a:xfrm>
           <a:prstGeom prst="rect">
             <a:avLst/>
@@ -2825,14 +3005,14 @@
               <a:buNone/>
             </a:pPr>
             <a:r>
-              <a:rPr lang="he-IL" altLang="en-US" sz="2200" b="1" dirty="0">
+              <a:rPr lang="he-IL" altLang="en-US" sz="2000" b="1" dirty="0">
                 <a:solidFill>
                   <a:schemeClr val="tx2"/>
                 </a:solidFill>
               </a:rPr>
               <a:t>מקורות נתונים</a:t>
             </a:r>
-            <a:endParaRPr lang="he-IL" sz="2200" dirty="0"/>
+            <a:endParaRPr lang="he-IL" sz="2000" dirty="0"/>
           </a:p>
         </p:txBody>
       </p:sp>
@@ -2844,8 +3024,8 @@
         </p:nvSpPr>
         <p:spPr>
           <a:xfrm>
-            <a:off x="8579815" y="2377440"/>
-            <a:ext cx="2834640" cy="3383280"/>
+            <a:off x="9311335" y="2468880"/>
+            <a:ext cx="2148840" cy="2651760"/>
           </a:xfrm>
           <a:prstGeom prst="rect">
             <a:avLst/>
@@ -2859,92 +3039,92 @@
           <a:p>
             <a:pPr rtl="1" algn="r" marL="342900" indent="-342900">
               <a:spcAft>
-                <a:spcPts val="1000"/>
+                <a:spcPts val="800"/>
               </a:spcAft>
               <a:buSzPct val="100000"/>
               <a:buChar char="•"/>
             </a:pPr>
             <a:r>
-              <a:rPr lang="he-IL" altLang="en-US" sz="1600" dirty="0">
+              <a:rPr lang="he-IL" altLang="en-US" sz="1500" dirty="0">
                 <a:solidFill>
                   <a:schemeClr val="tx1"/>
                 </a:solidFill>
               </a:rPr>
-              <a:t>HR ומערכות משימות</a:t>
-            </a:r>
-            <a:endParaRPr lang="he-IL" sz="1600" dirty="0"/>
+              <a:t>HR ומשימות</a:t>
+            </a:r>
+            <a:endParaRPr lang="he-IL" sz="1500" dirty="0"/>
           </a:p>
           <a:p>
             <a:pPr rtl="1" algn="r" marL="342900" indent="-342900">
               <a:spcAft>
-                <a:spcPts val="1000"/>
+                <a:spcPts val="800"/>
               </a:spcAft>
               <a:buSzPct val="100000"/>
               <a:buChar char="•"/>
             </a:pPr>
             <a:r>
-              <a:rPr lang="he-IL" altLang="en-US" sz="1600" dirty="0">
+              <a:rPr lang="he-IL" altLang="en-US" sz="1500" dirty="0">
                 <a:solidFill>
                   <a:schemeClr val="tx1"/>
                 </a:solidFill>
               </a:rPr>
-              <a:t>ITSM וכרטיסי תמיכה</a:t>
-            </a:r>
-            <a:endParaRPr lang="he-IL" sz="1600" dirty="0"/>
+              <a:t>ITSM</a:t>
+            </a:r>
+            <a:endParaRPr lang="he-IL" sz="1500" dirty="0"/>
           </a:p>
           <a:p>
             <a:pPr rtl="1" algn="r" marL="342900" indent="-342900">
               <a:spcAft>
-                <a:spcPts val="1000"/>
+                <a:spcPts val="800"/>
               </a:spcAft>
               <a:buSzPct val="100000"/>
               <a:buChar char="•"/>
             </a:pPr>
             <a:r>
-              <a:rPr lang="he-IL" altLang="en-US" sz="1600" dirty="0">
+              <a:rPr lang="he-IL" altLang="en-US" sz="1500" dirty="0">
                 <a:solidFill>
                   <a:schemeClr val="tx1"/>
                 </a:solidFill>
               </a:rPr>
-              <a:t>רכש ורישיונות SaaS</a:t>
-            </a:r>
-            <a:endParaRPr lang="he-IL" sz="1600" dirty="0"/>
+              <a:t>רכש ורישיונות</a:t>
+            </a:r>
+            <a:endParaRPr lang="he-IL" sz="1500" dirty="0"/>
           </a:p>
           <a:p>
             <a:pPr rtl="1" algn="r" marL="342900" indent="-342900">
               <a:spcAft>
-                <a:spcPts val="1000"/>
+                <a:spcPts val="800"/>
               </a:spcAft>
               <a:buSzPct val="100000"/>
               <a:buChar char="•"/>
             </a:pPr>
             <a:r>
-              <a:rPr lang="he-IL" altLang="en-US" sz="1600" dirty="0">
+              <a:rPr lang="he-IL" altLang="en-US" sz="1500" dirty="0">
                 <a:solidFill>
                   <a:schemeClr val="tx1"/>
                 </a:solidFill>
               </a:rPr>
-              <a:t>ענן ושרתים</a:t>
-            </a:r>
-            <a:endParaRPr lang="he-IL" sz="1600" dirty="0"/>
+              <a:t>Apptio ו-Turbonomic</a:t>
+            </a:r>
+            <a:endParaRPr lang="he-IL" sz="1500" dirty="0"/>
           </a:p>
           <a:p>
             <a:pPr rtl="1" algn="r" marL="342900" indent="-342900">
               <a:spcAft>
-                <a:spcPts val="1000"/>
+                <a:spcPts val="800"/>
               </a:spcAft>
               <a:buSzPct val="100000"/>
               <a:buChar char="•"/>
             </a:pPr>
             <a:r>
-              <a:rPr lang="he-IL" altLang="en-US" sz="1600" dirty="0">
+              <a:rPr lang="he-IL" altLang="en-US" sz="1500" dirty="0">
                 <a:solidFill>
                   <a:schemeClr val="tx1"/>
                 </a:solidFill>
               </a:rPr>
-              <a:t>מוני חשמל ו-BMS</a:t>
-            </a:r>
-            <a:endParaRPr lang="he-IL" sz="1600" dirty="0"/>
+              <a:t>Envizi ומוני חשמל</a:t>
+            </a:r>
+            <a:endParaRPr lang="he-IL" sz="1500" dirty="0"/>
           </a:p>
         </p:txBody>
       </p:sp>
@@ -2964,8 +3144,8 @@
         </p:blipFill>
         <p:spPr>
           <a:xfrm>
-            <a:off x="7866583" y="3520440"/>
-            <a:ext cx="365760" cy="365760"/>
+            <a:off x="8817559" y="3154680"/>
+            <a:ext cx="274320" cy="274320"/>
           </a:xfrm>
           <a:prstGeom prst="rect">
             <a:avLst/>
@@ -2980,12 +3160,12 @@
         </p:nvSpPr>
         <p:spPr>
           <a:xfrm>
-            <a:off x="4455871" y="1463040"/>
-            <a:ext cx="3291840" cy="4480560"/>
+            <a:off x="6266383" y="1417320"/>
+            <a:ext cx="2514600" cy="3794760"/>
           </a:xfrm>
           <a:prstGeom prst="roundRect">
             <a:avLst>
-              <a:gd name="adj" fmla="val 3333"/>
+              <a:gd name="adj" fmla="val 4364"/>
             </a:avLst>
           </a:prstGeom>
           <a:solidFill>
@@ -3007,8 +3187,8 @@
         </p:nvSpPr>
         <p:spPr>
           <a:xfrm>
-            <a:off x="4684471" y="1645920"/>
-            <a:ext cx="2834640" cy="548640"/>
+            <a:off x="6449263" y="1554480"/>
+            <a:ext cx="2148840" cy="457200"/>
           </a:xfrm>
           <a:prstGeom prst="rect">
             <a:avLst/>
@@ -3024,14 +3204,14 @@
               <a:buNone/>
             </a:pPr>
             <a:r>
-              <a:rPr lang="he-IL" altLang="en-US" sz="2200" b="1" dirty="0">
+              <a:rPr lang="he-IL" altLang="en-US" sz="2000" b="1" dirty="0">
                 <a:solidFill>
                   <a:schemeClr val="accent2"/>
                 </a:solidFill>
               </a:rPr>
-              <a:t>שכבת הניתוח</a:t>
-            </a:r>
-            <a:endParaRPr lang="he-IL" sz="2200" dirty="0"/>
+              <a:t>קטלוג נתונים</a:t>
+            </a:r>
+            <a:endParaRPr lang="he-IL" sz="2000" dirty="0"/>
           </a:p>
         </p:txBody>
       </p:sp>
@@ -3043,8 +3223,44 @@
         </p:nvSpPr>
         <p:spPr>
           <a:xfrm>
-            <a:off x="4684471" y="2377440"/>
-            <a:ext cx="2834640" cy="3383280"/>
+            <a:off x="6403543" y="2011680"/>
+            <a:ext cx="2240280" cy="365760"/>
+          </a:xfrm>
+          <a:prstGeom prst="rect">
+            <a:avLst/>
+          </a:prstGeom>
+          <a:noFill/>
+          <a:ln/>
+        </p:spPr>
+        <p:txBody>
+          <a:bodyPr wrap="square" rtlCol="0" anchor="ctr"/>
+          <a:lstStyle/>
+          <a:p>
+            <a:pPr algn="ctr" indent="0" marL="0">
+              <a:buNone/>
+            </a:pPr>
+            <a:r>
+              <a:rPr lang="en-US" sz="1300" i="1" dirty="0">
+                <a:solidFill>
+                  <a:schemeClr val="bg1"/>
+                </a:solidFill>
+              </a:rPr>
+              <a:t>watsonx.data intelligence</a:t>
+            </a:r>
+            <a:endParaRPr lang="en-US" sz="1300" dirty="0"/>
+          </a:p>
+        </p:txBody>
+      </p:sp>
+      <p:sp>
+        <p:nvSpPr>
+          <p:cNvPr id="10" name="Text 7"/>
+          <p:cNvSpPr txBox="1"/>
+          <p:nvPr/>
+        </p:nvSpPr>
+        <p:spPr>
+          <a:xfrm>
+            <a:off x="6449263" y="2468880"/>
+            <a:ext cx="2148840" cy="2651760"/>
           </a:xfrm>
           <a:prstGeom prst="rect">
             <a:avLst/>
@@ -3058,80 +3274,80 @@
           <a:p>
             <a:pPr rtl="1" algn="r" marL="342900" indent="-342900">
               <a:spcAft>
-                <a:spcPts val="1000"/>
+                <a:spcPts val="800"/>
               </a:spcAft>
               <a:buSzPct val="100000"/>
               <a:buChar char="•"/>
             </a:pPr>
             <a:r>
-              <a:rPr lang="he-IL" altLang="en-US" sz="1600" dirty="0">
+              <a:rPr lang="he-IL" altLang="en-US" sz="1500" dirty="0">
                 <a:solidFill>
                   <a:schemeClr val="bg1"/>
                 </a:solidFill>
               </a:rPr>
-              <a:t>watsonx.ai — זיהוי כפילויות</a:t>
-            </a:r>
-            <a:endParaRPr lang="he-IL" sz="1600" dirty="0"/>
+              <a:t>קטלוג אחיד לכל המקורות</a:t>
+            </a:r>
+            <a:endParaRPr lang="he-IL" sz="1500" dirty="0"/>
           </a:p>
           <a:p>
             <a:pPr rtl="1" algn="r" marL="342900" indent="-342900">
               <a:spcAft>
-                <a:spcPts val="1000"/>
+                <a:spcPts val="800"/>
               </a:spcAft>
               <a:buSzPct val="100000"/>
               <a:buChar char="•"/>
             </a:pPr>
             <a:r>
-              <a:rPr lang="he-IL" altLang="en-US" sz="1600" dirty="0">
+              <a:rPr lang="he-IL" altLang="en-US" sz="1500" dirty="0">
                 <a:solidFill>
                   <a:schemeClr val="bg1"/>
                 </a:solidFill>
               </a:rPr>
-              <a:t>Apptio — עלויות IT</a:t>
-            </a:r>
-            <a:endParaRPr lang="he-IL" sz="1600" dirty="0"/>
+              <a:t>מילון מונחים עסקי</a:t>
+            </a:r>
+            <a:endParaRPr lang="he-IL" sz="1500" dirty="0"/>
           </a:p>
           <a:p>
             <a:pPr rtl="1" algn="r" marL="342900" indent="-342900">
               <a:spcAft>
-                <a:spcPts val="1000"/>
+                <a:spcPts val="800"/>
               </a:spcAft>
               <a:buSzPct val="100000"/>
               <a:buChar char="•"/>
             </a:pPr>
             <a:r>
-              <a:rPr lang="he-IL" altLang="en-US" sz="1600" dirty="0">
+              <a:rPr lang="he-IL" altLang="en-US" sz="1500" dirty="0">
                 <a:solidFill>
                   <a:schemeClr val="bg1"/>
                 </a:solidFill>
               </a:rPr>
-              <a:t>Turbonomic — ניצול משאבים</a:t>
-            </a:r>
-            <a:endParaRPr lang="he-IL" sz="1600" dirty="0"/>
+              <a:t>שושלת נתונים (lineage)</a:t>
+            </a:r>
+            <a:endParaRPr lang="he-IL" sz="1500" dirty="0"/>
           </a:p>
           <a:p>
             <a:pPr rtl="1" algn="r" marL="342900" indent="-342900">
               <a:spcAft>
-                <a:spcPts val="1000"/>
+                <a:spcPts val="800"/>
               </a:spcAft>
               <a:buSzPct val="100000"/>
               <a:buChar char="•"/>
             </a:pPr>
             <a:r>
-              <a:rPr lang="he-IL" altLang="en-US" sz="1600" dirty="0">
+              <a:rPr lang="he-IL" altLang="en-US" sz="1500" dirty="0">
                 <a:solidFill>
                   <a:schemeClr val="bg1"/>
                 </a:solidFill>
               </a:rPr>
-              <a:t>Envizi — אנרגיה ופליטות</a:t>
-            </a:r>
-            <a:endParaRPr lang="he-IL" sz="1600" dirty="0"/>
+              <a:t>מיסוך מידע אישי</a:t>
+            </a:r>
+            <a:endParaRPr lang="he-IL" sz="1500" dirty="0"/>
           </a:p>
         </p:txBody>
       </p:sp>
       <p:pic>
         <p:nvPicPr>
-          <p:cNvPr id="10" name="arch arrow 2" descr="חץ">    </p:cNvPr>
+          <p:cNvPr id="11" name="arch arrow 2" descr="חץ">    </p:cNvPr>
           <p:cNvPicPr>
             <a:picLocks noChangeAspect="1"/>
           </p:cNvPicPr>
@@ -3145,8 +3361,8 @@
         </p:blipFill>
         <p:spPr>
           <a:xfrm>
-            <a:off x="3971239" y="3520440"/>
-            <a:ext cx="365760" cy="365760"/>
+            <a:off x="5955487" y="3154680"/>
+            <a:ext cx="274320" cy="274320"/>
           </a:xfrm>
           <a:prstGeom prst="rect">
             <a:avLst/>
@@ -3155,18 +3371,18 @@
       </p:pic>
       <p:sp>
         <p:nvSpPr>
-          <p:cNvPr id="11" name="architecture column 3"/>
+          <p:cNvPr id="12" name="architecture column 3"/>
           <p:cNvSpPr/>
           <p:nvPr/>
         </p:nvSpPr>
         <p:spPr>
           <a:xfrm>
-            <a:off x="560527" y="1463040"/>
-            <a:ext cx="3291840" cy="4480560"/>
+            <a:off x="3404311" y="1417320"/>
+            <a:ext cx="2514600" cy="3794760"/>
           </a:xfrm>
           <a:prstGeom prst="roundRect">
             <a:avLst>
-              <a:gd name="adj" fmla="val 3333"/>
+              <a:gd name="adj" fmla="val 4364"/>
             </a:avLst>
           </a:prstGeom>
           <a:solidFill>
@@ -3182,50 +3398,86 @@
       </p:sp>
       <p:sp>
         <p:nvSpPr>
-          <p:cNvPr id="12" name="Text 8"/>
-          <p:cNvSpPr txBox="1"/>
-          <p:nvPr/>
-        </p:nvSpPr>
-        <p:spPr>
-          <a:xfrm>
-            <a:off x="789127" y="1645920"/>
-            <a:ext cx="2834640" cy="548640"/>
-          </a:xfrm>
-          <a:prstGeom prst="rect">
-            <a:avLst/>
-          </a:prstGeom>
-          <a:noFill/>
-          <a:ln/>
-        </p:spPr>
-        <p:txBody>
-          <a:bodyPr wrap="square" rtlCol="0" anchor="ctr"/>
-          <a:lstStyle/>
-          <a:p>
-            <a:pPr rtl="1" algn="ctr" indent="0" marL="0">
-              <a:buNone/>
-            </a:pPr>
-            <a:r>
-              <a:rPr lang="he-IL" altLang="en-US" sz="2200" b="1" dirty="0">
-                <a:solidFill>
-                  <a:schemeClr val="accent2"/>
-                </a:solidFill>
-              </a:rPr>
-              <a:t>בקרה ותוצר</a:t>
-            </a:r>
-            <a:endParaRPr lang="he-IL" sz="2200" dirty="0"/>
-          </a:p>
-        </p:txBody>
-      </p:sp>
-      <p:sp>
-        <p:nvSpPr>
           <p:cNvPr id="13" name="Text 9"/>
           <p:cNvSpPr txBox="1"/>
           <p:nvPr/>
         </p:nvSpPr>
         <p:spPr>
           <a:xfrm>
-            <a:off x="789127" y="2377440"/>
-            <a:ext cx="2834640" cy="3383280"/>
+            <a:off x="3587191" y="1554480"/>
+            <a:ext cx="2148840" cy="457200"/>
+          </a:xfrm>
+          <a:prstGeom prst="rect">
+            <a:avLst/>
+          </a:prstGeom>
+          <a:noFill/>
+          <a:ln/>
+        </p:spPr>
+        <p:txBody>
+          <a:bodyPr wrap="square" rtlCol="0" anchor="ctr"/>
+          <a:lstStyle/>
+          <a:p>
+            <a:pPr rtl="1" algn="ctr" indent="0" marL="0">
+              <a:buNone/>
+            </a:pPr>
+            <a:r>
+              <a:rPr lang="he-IL" altLang="en-US" sz="2000" b="1" dirty="0">
+                <a:solidFill>
+                  <a:schemeClr val="accent2"/>
+                </a:solidFill>
+              </a:rPr>
+              <a:t>אורקסטרציה</a:t>
+            </a:r>
+            <a:endParaRPr lang="he-IL" sz="2000" dirty="0"/>
+          </a:p>
+        </p:txBody>
+      </p:sp>
+      <p:sp>
+        <p:nvSpPr>
+          <p:cNvPr id="14" name="Text 10"/>
+          <p:cNvSpPr txBox="1"/>
+          <p:nvPr/>
+        </p:nvSpPr>
+        <p:spPr>
+          <a:xfrm>
+            <a:off x="3541471" y="2011680"/>
+            <a:ext cx="2240280" cy="365760"/>
+          </a:xfrm>
+          <a:prstGeom prst="rect">
+            <a:avLst/>
+          </a:prstGeom>
+          <a:noFill/>
+          <a:ln/>
+        </p:spPr>
+        <p:txBody>
+          <a:bodyPr wrap="square" rtlCol="0" anchor="ctr"/>
+          <a:lstStyle/>
+          <a:p>
+            <a:pPr algn="ctr" indent="0" marL="0">
+              <a:buNone/>
+            </a:pPr>
+            <a:r>
+              <a:rPr lang="en-US" sz="1300" i="1" dirty="0">
+                <a:solidFill>
+                  <a:schemeClr val="bg1"/>
+                </a:solidFill>
+              </a:rPr>
+              <a:t>watsonx Orchestrate</a:t>
+            </a:r>
+            <a:endParaRPr lang="en-US" sz="1300" dirty="0"/>
+          </a:p>
+        </p:txBody>
+      </p:sp>
+      <p:sp>
+        <p:nvSpPr>
+          <p:cNvPr id="15" name="Text 11"/>
+          <p:cNvSpPr txBox="1"/>
+          <p:nvPr/>
+        </p:nvSpPr>
+        <p:spPr>
+          <a:xfrm>
+            <a:off x="3587191" y="2468880"/>
+            <a:ext cx="2148840" cy="2651760"/>
           </a:xfrm>
           <a:prstGeom prst="rect">
             <a:avLst/>
@@ -3239,74 +3491,360 @@
           <a:p>
             <a:pPr rtl="1" algn="r" marL="342900" indent="-342900">
               <a:spcAft>
-                <a:spcPts val="1000"/>
+                <a:spcPts val="800"/>
               </a:spcAft>
               <a:buSzPct val="100000"/>
               <a:buChar char="•"/>
             </a:pPr>
             <a:r>
-              <a:rPr lang="he-IL" altLang="en-US" sz="1600" dirty="0">
+              <a:rPr lang="he-IL" altLang="en-US" sz="1500" dirty="0">
                 <a:solidFill>
                   <a:schemeClr val="bg1"/>
                 </a:solidFill>
               </a:rPr>
-              <a:t>watsonx.governance — שקיפות</a:t>
-            </a:r>
-            <a:endParaRPr lang="he-IL" sz="1600" dirty="0"/>
+              <a:t>סוכן אנשים</a:t>
+            </a:r>
+            <a:endParaRPr lang="he-IL" sz="1500" dirty="0"/>
           </a:p>
           <a:p>
             <a:pPr rtl="1" algn="r" marL="342900" indent="-342900">
               <a:spcAft>
-                <a:spcPts val="1000"/>
+                <a:spcPts val="800"/>
               </a:spcAft>
               <a:buSzPct val="100000"/>
               <a:buChar char="•"/>
             </a:pPr>
             <a:r>
-              <a:rPr lang="he-IL" altLang="en-US" sz="1600" dirty="0">
+              <a:rPr lang="he-IL" altLang="en-US" sz="1500" dirty="0">
                 <a:solidFill>
                   <a:schemeClr val="bg1"/>
                 </a:solidFill>
               </a:rPr>
-              <a:t>מבחן הרווח</a:t>
-            </a:r>
-            <a:endParaRPr lang="he-IL" sz="1600" dirty="0"/>
+              <a:t>סוכן כלים</a:t>
+            </a:r>
+            <a:endParaRPr lang="he-IL" sz="1500" dirty="0"/>
           </a:p>
           <a:p>
             <a:pPr rtl="1" algn="r" marL="342900" indent="-342900">
               <a:spcAft>
-                <a:spcPts val="1000"/>
+                <a:spcPts val="800"/>
               </a:spcAft>
               <a:buSzPct val="100000"/>
               <a:buChar char="•"/>
             </a:pPr>
             <a:r>
-              <a:rPr lang="he-IL" altLang="en-US" sz="1600" dirty="0">
+              <a:rPr lang="he-IL" altLang="en-US" sz="1500" dirty="0">
                 <a:solidFill>
                   <a:schemeClr val="bg1"/>
                 </a:solidFill>
               </a:rPr>
-              <a:t>דשבורד ניהולי</a:t>
-            </a:r>
-            <a:endParaRPr lang="he-IL" sz="1600" dirty="0"/>
+              <a:t>סוכן חשמל</a:t>
+            </a:r>
+            <a:endParaRPr lang="he-IL" sz="1500" dirty="0"/>
           </a:p>
           <a:p>
             <a:pPr rtl="1" algn="r" marL="342900" indent="-342900">
               <a:spcAft>
-                <a:spcPts val="1000"/>
+                <a:spcPts val="800"/>
               </a:spcAft>
               <a:buSzPct val="100000"/>
               <a:buChar char="•"/>
             </a:pPr>
             <a:r>
-              <a:rPr lang="he-IL" altLang="en-US" sz="1600" dirty="0">
+              <a:rPr lang="he-IL" altLang="en-US" sz="1500" dirty="0">
                 <a:solidFill>
                   <a:schemeClr val="bg1"/>
                 </a:solidFill>
               </a:rPr>
-              <a:t>עוזר שיחה: ״איפה הכסף?״</a:t>
-            </a:r>
-            <a:endParaRPr lang="he-IL" sz="1600" dirty="0"/>
+              <a:t>סוכן ״מבחן רווח״</a:t>
+            </a:r>
+            <a:endParaRPr lang="he-IL" sz="1500" dirty="0"/>
+          </a:p>
+        </p:txBody>
+      </p:sp>
+      <p:pic>
+        <p:nvPicPr>
+          <p:cNvPr id="16" name="arch arrow 3" descr="חץ">    </p:cNvPr>
+          <p:cNvPicPr>
+            <a:picLocks noChangeAspect="1"/>
+          </p:cNvPicPr>
+          <p:nvPr/>
+        </p:nvPicPr>
+        <p:blipFill>
+          <a:blip r:embed="rId3"/>
+          <a:stretch>
+            <a:fillRect/>
+          </a:stretch>
+        </p:blipFill>
+        <p:spPr>
+          <a:xfrm>
+            <a:off x="3093415" y="3154680"/>
+            <a:ext cx="274320" cy="274320"/>
+          </a:xfrm>
+          <a:prstGeom prst="rect">
+            <a:avLst/>
+          </a:prstGeom>
+        </p:spPr>
+      </p:pic>
+      <p:sp>
+        <p:nvSpPr>
+          <p:cNvPr id="17" name="architecture column 4"/>
+          <p:cNvSpPr/>
+          <p:nvPr/>
+        </p:nvSpPr>
+        <p:spPr>
+          <a:xfrm>
+            <a:off x="542239" y="1417320"/>
+            <a:ext cx="2514600" cy="3794760"/>
+          </a:xfrm>
+          <a:prstGeom prst="roundRect">
+            <a:avLst>
+              <a:gd name="adj" fmla="val 4364"/>
+            </a:avLst>
+          </a:prstGeom>
+          <a:solidFill>
+            <a:schemeClr val="bg2"/>
+          </a:solidFill>
+          <a:ln w="12700">
+            <a:solidFill>
+              <a:schemeClr val="bg2"/>
+            </a:solidFill>
+            <a:prstDash val="solid"/>
+          </a:ln>
+        </p:spPr>
+      </p:sp>
+      <p:sp>
+        <p:nvSpPr>
+          <p:cNvPr id="18" name="Text 13"/>
+          <p:cNvSpPr txBox="1"/>
+          <p:nvPr/>
+        </p:nvSpPr>
+        <p:spPr>
+          <a:xfrm>
+            <a:off x="725119" y="1554480"/>
+            <a:ext cx="2148840" cy="457200"/>
+          </a:xfrm>
+          <a:prstGeom prst="rect">
+            <a:avLst/>
+          </a:prstGeom>
+          <a:noFill/>
+          <a:ln/>
+        </p:spPr>
+        <p:txBody>
+          <a:bodyPr wrap="square" rtlCol="0" anchor="ctr"/>
+          <a:lstStyle/>
+          <a:p>
+            <a:pPr rtl="1" algn="ctr" indent="0" marL="0">
+              <a:buNone/>
+            </a:pPr>
+            <a:r>
+              <a:rPr lang="he-IL" altLang="en-US" sz="2000" b="1" dirty="0">
+                <a:solidFill>
+                  <a:schemeClr val="tx2"/>
+                </a:solidFill>
+              </a:rPr>
+              <a:t>פעולה ובקרה</a:t>
+            </a:r>
+            <a:endParaRPr lang="he-IL" sz="2000" dirty="0"/>
+          </a:p>
+        </p:txBody>
+      </p:sp>
+      <p:sp>
+        <p:nvSpPr>
+          <p:cNvPr id="19" name="Text 14"/>
+          <p:cNvSpPr txBox="1"/>
+          <p:nvPr/>
+        </p:nvSpPr>
+        <p:spPr>
+          <a:xfrm>
+            <a:off x="679399" y="2011680"/>
+            <a:ext cx="2240280" cy="365760"/>
+          </a:xfrm>
+          <a:prstGeom prst="rect">
+            <a:avLst/>
+          </a:prstGeom>
+          <a:noFill/>
+          <a:ln/>
+        </p:spPr>
+        <p:txBody>
+          <a:bodyPr wrap="square" rtlCol="0" anchor="ctr"/>
+          <a:lstStyle/>
+          <a:p>
+            <a:pPr algn="ctr" indent="0" marL="0">
+              <a:buNone/>
+            </a:pPr>
+            <a:r>
+              <a:rPr lang="en-US" sz="1300" i="1" dirty="0">
+                <a:solidFill>
+                  <a:schemeClr val="tx1"/>
+                </a:solidFill>
+              </a:rPr>
+              <a:t>watsonx.governance</a:t>
+            </a:r>
+            <a:endParaRPr lang="en-US" sz="1300" dirty="0"/>
+          </a:p>
+        </p:txBody>
+      </p:sp>
+      <p:sp>
+        <p:nvSpPr>
+          <p:cNvPr id="20" name="Text 15"/>
+          <p:cNvSpPr txBox="1"/>
+          <p:nvPr/>
+        </p:nvSpPr>
+        <p:spPr>
+          <a:xfrm>
+            <a:off x="725119" y="2468880"/>
+            <a:ext cx="2148840" cy="2651760"/>
+          </a:xfrm>
+          <a:prstGeom prst="rect">
+            <a:avLst/>
+          </a:prstGeom>
+          <a:noFill/>
+          <a:ln/>
+        </p:spPr>
+        <p:txBody>
+          <a:bodyPr wrap="square" rtlCol="0" anchor="t"/>
+          <a:lstStyle/>
+          <a:p>
+            <a:pPr rtl="1" algn="r" marL="342900" indent="-342900">
+              <a:spcAft>
+                <a:spcPts val="800"/>
+              </a:spcAft>
+              <a:buSzPct val="100000"/>
+              <a:buChar char="•"/>
+            </a:pPr>
+            <a:r>
+              <a:rPr lang="he-IL" altLang="en-US" sz="1500" dirty="0">
+                <a:solidFill>
+                  <a:schemeClr val="tx1"/>
+                </a:solidFill>
+              </a:rPr>
+              <a:t>אישור מנהל ה-IT</a:t>
+            </a:r>
+            <a:endParaRPr lang="he-IL" sz="1500" dirty="0"/>
+          </a:p>
+          <a:p>
+            <a:pPr rtl="1" algn="r" marL="342900" indent="-342900">
+              <a:spcAft>
+                <a:spcPts val="800"/>
+              </a:spcAft>
+              <a:buSzPct val="100000"/>
+              <a:buChar char="•"/>
+            </a:pPr>
+            <a:r>
+              <a:rPr lang="he-IL" altLang="en-US" sz="1500" dirty="0">
+                <a:solidFill>
+                  <a:schemeClr val="tx1"/>
+                </a:solidFill>
+              </a:rPr>
+              <a:t>פתיחת קריאה / ביטול רישיון</a:t>
+            </a:r>
+            <a:endParaRPr lang="he-IL" sz="1500" dirty="0"/>
+          </a:p>
+          <a:p>
+            <a:pPr rtl="1" algn="r" marL="342900" indent="-342900">
+              <a:spcAft>
+                <a:spcPts val="800"/>
+              </a:spcAft>
+              <a:buSzPct val="100000"/>
+              <a:buChar char="•"/>
+            </a:pPr>
+            <a:r>
+              <a:rPr lang="he-IL" altLang="en-US" sz="1500" dirty="0">
+                <a:solidFill>
+                  <a:schemeClr val="tx1"/>
+                </a:solidFill>
+              </a:rPr>
+              <a:t>דשבורד ומעקב חיסכון</a:t>
+            </a:r>
+            <a:endParaRPr lang="he-IL" sz="1500" dirty="0"/>
+          </a:p>
+        </p:txBody>
+      </p:sp>
+      <p:sp>
+        <p:nvSpPr>
+          <p:cNvPr id="21" name="bob band"/>
+          <p:cNvSpPr/>
+          <p:nvPr/>
+        </p:nvSpPr>
+        <p:spPr>
+          <a:xfrm>
+            <a:off x="548640" y="5440680"/>
+            <a:ext cx="11091672" cy="731520"/>
+          </a:xfrm>
+          <a:prstGeom prst="roundRect">
+            <a:avLst>
+              <a:gd name="adj" fmla="val 15000"/>
+            </a:avLst>
+          </a:prstGeom>
+          <a:solidFill>
+            <a:schemeClr val="accent2"/>
+          </a:solidFill>
+          <a:ln w="12700">
+            <a:solidFill>
+              <a:schemeClr val="accent2"/>
+            </a:solidFill>
+            <a:prstDash val="solid"/>
+          </a:ln>
+        </p:spPr>
+      </p:sp>
+      <p:pic>
+        <p:nvPicPr>
+          <p:cNvPr id="22" name="bob band icon" descr="קוד">    </p:cNvPr>
+          <p:cNvPicPr>
+            <a:picLocks noChangeAspect="1"/>
+          </p:cNvPicPr>
+          <p:nvPr/>
+        </p:nvPicPr>
+        <p:blipFill>
+          <a:blip r:embed="rId4"/>
+          <a:stretch>
+            <a:fillRect/>
+          </a:stretch>
+        </p:blipFill>
+        <p:spPr>
+          <a:xfrm>
+            <a:off x="10972800" y="5577840"/>
+            <a:ext cx="457200" cy="457200"/>
+          </a:xfrm>
+          <a:prstGeom prst="rect">
+            <a:avLst/>
+          </a:prstGeom>
+        </p:spPr>
+      </p:pic>
+      <p:sp>
+        <p:nvSpPr>
+          <p:cNvPr id="23" name="Text 17"/>
+          <p:cNvSpPr txBox="1"/>
+          <p:nvPr/>
+        </p:nvSpPr>
+        <p:spPr>
+          <a:xfrm>
+            <a:off x="822960" y="5468112"/>
+            <a:ext cx="9966960" cy="685800"/>
+          </a:xfrm>
+          <a:prstGeom prst="rect">
+            <a:avLst/>
+          </a:prstGeom>
+          <a:noFill/>
+          <a:ln/>
+        </p:spPr>
+        <p:txBody>
+          <a:bodyPr wrap="square" rtlCol="0" anchor="ctr"/>
+          <a:lstStyle/>
+          <a:p>
+            <a:pPr rtl="1" algn="r" indent="0" marL="0">
+              <a:buNone/>
+            </a:pPr>
+            <a:r>
+              <a:rPr lang="he-IL" altLang="en-US" sz="1800" b="1" dirty="0">
+                <a:solidFill>
+                  <a:schemeClr val="tx2"/>
+                </a:solidFill>
+              </a:rPr>
+              <a:t>כל השכבות נבנות ומתוחזקות עם IBM Bob — שותף הפיתוח מבוסס ה-AI של IBM</a:t>
+            </a:r>
+            <a:endParaRPr lang="he-IL" sz="1800" dirty="0"/>
           </a:p>
         </p:txBody>
       </p:sp>
@@ -3412,7 +3950,7 @@
                   <a:schemeClr val="tx2"/>
                 </a:solidFill>
               </a:rPr>
-              <a:t>מפת דרכים ל-12 חודשים</a:t>
+              <a:t>איך זה עובד: סוכנים ב-watsonx Orchestrate</a:t>
             </a:r>
             <a:endParaRPr lang="he-IL" sz="3200" dirty="0"/>
           </a:p>
@@ -3420,102 +3958,18 @@
       </p:sp>
       <p:sp>
         <p:nvSpPr>
-          <p:cNvPr id="3" name="timeline line"/>
+          <p:cNvPr id="3" name="manager question"/>
           <p:cNvSpPr/>
           <p:nvPr/>
         </p:nvSpPr>
         <p:spPr>
           <a:xfrm>
-            <a:off x="1097280" y="2743200"/>
-            <a:ext cx="9966960" cy="0"/>
-          </a:xfrm>
-          <a:prstGeom prst="line">
-            <a:avLst/>
-          </a:prstGeom>
-          <a:noFill/>
-          <a:ln w="38100">
-            <a:solidFill>
-              <a:schemeClr val="accent3"/>
-            </a:solidFill>
-            <a:prstDash val="solid"/>
-          </a:ln>
-        </p:spPr>
-      </p:sp>
-      <p:sp>
-        <p:nvSpPr>
-          <p:cNvPr id="4" name="milestone 1"/>
-          <p:cNvSpPr/>
-          <p:nvPr/>
-        </p:nvSpPr>
-        <p:spPr>
-          <a:xfrm>
-            <a:off x="10111435" y="2468880"/>
-            <a:ext cx="548640" cy="548640"/>
-          </a:xfrm>
-          <a:prstGeom prst="ellipse">
-            <a:avLst/>
-          </a:prstGeom>
-          <a:solidFill>
-            <a:schemeClr val="accent2"/>
-          </a:solidFill>
-          <a:ln w="25400">
-            <a:solidFill>
-              <a:srgbClr val="FFFFFF"/>
-            </a:solidFill>
-            <a:prstDash val="solid"/>
-          </a:ln>
-        </p:spPr>
-      </p:sp>
-      <p:sp>
-        <p:nvSpPr>
-          <p:cNvPr id="5" name="Text 3"/>
-          <p:cNvSpPr txBox="1"/>
-          <p:nvPr/>
-        </p:nvSpPr>
-        <p:spPr>
-          <a:xfrm>
-            <a:off x="9128455" y="1874520"/>
-            <a:ext cx="2514600" cy="411480"/>
-          </a:xfrm>
-          <a:prstGeom prst="rect">
-            <a:avLst/>
-          </a:prstGeom>
-          <a:noFill/>
-          <a:ln/>
-        </p:spPr>
-        <p:txBody>
-          <a:bodyPr wrap="square" rtlCol="0" anchor="ctr"/>
-          <a:lstStyle/>
-          <a:p>
-            <a:pPr rtl="1" algn="ctr" indent="0" marL="0">
-              <a:buNone/>
-            </a:pPr>
-            <a:r>
-              <a:rPr lang="he-IL" altLang="en-US" sz="1500" b="1" dirty="0">
-                <a:solidFill>
-                  <a:schemeClr val="accent4"/>
-                </a:solidFill>
-              </a:rPr>
-              <a:t>רבעון 1</a:t>
-            </a:r>
-            <a:endParaRPr lang="he-IL" sz="1500" dirty="0"/>
-          </a:p>
-        </p:txBody>
-      </p:sp>
-      <p:sp>
-        <p:nvSpPr>
-          <p:cNvPr id="6" name="milestone card 1"/>
-          <p:cNvSpPr/>
-          <p:nvPr/>
-        </p:nvSpPr>
-        <p:spPr>
-          <a:xfrm>
-            <a:off x="9128455" y="3291840"/>
-            <a:ext cx="2514600" cy="2377440"/>
+            <a:off x="9768535" y="1600200"/>
+            <a:ext cx="1874520" cy="3840480"/>
           </a:xfrm>
           <a:prstGeom prst="roundRect">
             <a:avLst>
-              <a:gd name="adj" fmla="val 4615"/>
+              <a:gd name="adj" fmla="val 5854"/>
             </a:avLst>
           </a:prstGeom>
           <a:solidFill>
@@ -3531,14 +3985,63 @@
       </p:sp>
       <p:sp>
         <p:nvSpPr>
-          <p:cNvPr id="7" name="Text 5"/>
+          <p:cNvPr id="4" name="מנהל IT circle"/>
+          <p:cNvSpPr/>
+          <p:nvPr/>
+        </p:nvSpPr>
+        <p:spPr>
+          <a:xfrm>
+            <a:off x="10294315" y="1874520"/>
+            <a:ext cx="822960" cy="822960"/>
+          </a:xfrm>
+          <a:prstGeom prst="ellipse">
+            <a:avLst/>
+          </a:prstGeom>
+          <a:solidFill>
+            <a:schemeClr val="tx2"/>
+          </a:solidFill>
+          <a:ln w="12700">
+            <a:solidFill>
+              <a:schemeClr val="tx2"/>
+            </a:solidFill>
+            <a:prstDash val="solid"/>
+          </a:ln>
+        </p:spPr>
+      </p:sp>
+      <p:pic>
+        <p:nvPicPr>
+          <p:cNvPr id="5" name="מנהל IT icon" descr="מנהל IT">    </p:cNvPr>
+          <p:cNvPicPr>
+            <a:picLocks noChangeAspect="1"/>
+          </p:cNvPicPr>
+          <p:nvPr/>
+        </p:nvPicPr>
+        <p:blipFill>
+          <a:blip r:embed="rId1"/>
+          <a:stretch>
+            <a:fillRect/>
+          </a:stretch>
+        </p:blipFill>
+        <p:spPr>
+          <a:xfrm>
+            <a:off x="10500055" y="2080260"/>
+            <a:ext cx="411480" cy="411480"/>
+          </a:xfrm>
+          <a:prstGeom prst="rect">
+            <a:avLst/>
+          </a:prstGeom>
+        </p:spPr>
+      </p:pic>
+      <p:sp>
+        <p:nvSpPr>
+          <p:cNvPr id="6" name="Text 3"/>
           <p:cNvSpPr txBox="1"/>
           <p:nvPr/>
         </p:nvSpPr>
         <p:spPr>
           <a:xfrm>
-            <a:off x="9311335" y="3429000"/>
-            <a:ext cx="2148840" cy="502920"/>
+            <a:off x="9859975" y="2834640"/>
+            <a:ext cx="1691640" cy="457200"/>
           </a:xfrm>
           <a:prstGeom prst="rect">
             <a:avLst/>
@@ -3554,27 +4057,27 @@
               <a:buNone/>
             </a:pPr>
             <a:r>
-              <a:rPr lang="he-IL" altLang="en-US" sz="2200" b="1" dirty="0">
+              <a:rPr lang="he-IL" altLang="en-US" sz="1700" b="1" dirty="0">
                 <a:solidFill>
                   <a:schemeClr val="tx2"/>
                 </a:solidFill>
               </a:rPr>
-              <a:t>MVP</a:t>
-            </a:r>
-            <a:endParaRPr lang="he-IL" sz="2200" dirty="0"/>
-          </a:p>
-        </p:txBody>
-      </p:sp>
-      <p:sp>
-        <p:nvSpPr>
-          <p:cNvPr id="8" name="Text 6"/>
+              <a:t>מנהל ה-IT שואל</a:t>
+            </a:r>
+            <a:endParaRPr lang="he-IL" sz="1700" dirty="0"/>
+          </a:p>
+        </p:txBody>
+      </p:sp>
+      <p:sp>
+        <p:nvSpPr>
+          <p:cNvPr id="7" name="Text 4"/>
           <p:cNvSpPr txBox="1"/>
           <p:nvPr/>
         </p:nvSpPr>
         <p:spPr>
           <a:xfrm>
-            <a:off x="9311335" y="3977640"/>
-            <a:ext cx="2148840" cy="1554480"/>
+            <a:off x="9905695" y="3337560"/>
+            <a:ext cx="1600200" cy="1463040"/>
           </a:xfrm>
           <a:prstGeom prst="rect">
             <a:avLst/>
@@ -3590,27 +4093,78 @@
               <a:buNone/>
             </a:pPr>
             <a:r>
-              <a:rPr lang="he-IL" altLang="en-US" sz="1500" dirty="0">
+              <a:rPr lang="he-IL" altLang="en-US" sz="1500" i="1" dirty="0">
                 <a:solidFill>
                   <a:schemeClr val="tx1"/>
                 </a:solidFill>
               </a:rPr>
-              <a:t>מנועי כלים וחשמל, חיבור ל-Apptio ו-Turbonomic</a:t>
+              <a:t>״איפה אפשר לחסוך 10% בלי לפגוע ב-SLA?״</a:t>
             </a:r>
             <a:endParaRPr lang="he-IL" sz="1500" dirty="0"/>
           </a:p>
         </p:txBody>
       </p:sp>
-      <p:sp>
-        <p:nvSpPr>
-          <p:cNvPr id="9" name="milestone 2"/>
+      <p:pic>
+        <p:nvPicPr>
+          <p:cNvPr id="8" name="flow arrow 1" descr="חץ">    </p:cNvPr>
+          <p:cNvPicPr>
+            <a:picLocks noChangeAspect="1"/>
+          </p:cNvPicPr>
+          <p:nvPr/>
+        </p:nvPicPr>
+        <p:blipFill>
+          <a:blip r:embed="rId2"/>
+          <a:stretch>
+            <a:fillRect/>
+          </a:stretch>
+        </p:blipFill>
+        <p:spPr>
+          <a:xfrm>
+            <a:off x="9416491" y="3383280"/>
+            <a:ext cx="274320" cy="274320"/>
+          </a:xfrm>
+          <a:prstGeom prst="rect">
+            <a:avLst/>
+          </a:prstGeom>
+        </p:spPr>
+      </p:pic>
+      <p:sp>
+        <p:nvSpPr>
+          <p:cNvPr id="9" name="orchestrator"/>
           <p:cNvSpPr/>
           <p:nvPr/>
         </p:nvSpPr>
         <p:spPr>
           <a:xfrm>
-            <a:off x="7249363" y="2468880"/>
-            <a:ext cx="548640" cy="548640"/>
+            <a:off x="7464247" y="1600200"/>
+            <a:ext cx="1874520" cy="3840480"/>
+          </a:xfrm>
+          <a:prstGeom prst="roundRect">
+            <a:avLst>
+              <a:gd name="adj" fmla="val 5854"/>
+            </a:avLst>
+          </a:prstGeom>
+          <a:solidFill>
+            <a:schemeClr val="tx2"/>
+          </a:solidFill>
+          <a:ln w="12700">
+            <a:solidFill>
+              <a:schemeClr val="tx2"/>
+            </a:solidFill>
+            <a:prstDash val="solid"/>
+          </a:ln>
+        </p:spPr>
+      </p:sp>
+      <p:sp>
+        <p:nvSpPr>
+          <p:cNvPr id="10" name="סוכן מתאם circle"/>
+          <p:cNvSpPr/>
+          <p:nvPr/>
+        </p:nvSpPr>
+        <p:spPr>
+          <a:xfrm>
+            <a:off x="7990027" y="1874520"/>
+            <a:ext cx="822960" cy="822960"/>
           </a:xfrm>
           <a:prstGeom prst="ellipse">
             <a:avLst/>
@@ -3618,24 +4172,48 @@
           <a:solidFill>
             <a:schemeClr val="accent1"/>
           </a:solidFill>
-          <a:ln w="25400">
+          <a:ln w="12700">
             <a:solidFill>
-              <a:srgbClr val="FFFFFF"/>
+              <a:schemeClr val="accent1"/>
             </a:solidFill>
             <a:prstDash val="solid"/>
           </a:ln>
         </p:spPr>
       </p:sp>
-      <p:sp>
-        <p:nvSpPr>
-          <p:cNvPr id="10" name="Text 8"/>
+      <p:pic>
+        <p:nvPicPr>
+          <p:cNvPr id="11" name="סוכן מתאם icon" descr="סוכן מתאם">    </p:cNvPr>
+          <p:cNvPicPr>
+            <a:picLocks noChangeAspect="1"/>
+          </p:cNvPicPr>
+          <p:nvPr/>
+        </p:nvPicPr>
+        <p:blipFill>
+          <a:blip r:embed="rId3"/>
+          <a:stretch>
+            <a:fillRect/>
+          </a:stretch>
+        </p:blipFill>
+        <p:spPr>
+          <a:xfrm>
+            <a:off x="8195767" y="2080260"/>
+            <a:ext cx="411480" cy="411480"/>
+          </a:xfrm>
+          <a:prstGeom prst="rect">
+            <a:avLst/>
+          </a:prstGeom>
+        </p:spPr>
+      </p:pic>
+      <p:sp>
+        <p:nvSpPr>
+          <p:cNvPr id="12" name="Text 7"/>
           <p:cNvSpPr txBox="1"/>
           <p:nvPr/>
         </p:nvSpPr>
         <p:spPr>
           <a:xfrm>
-            <a:off x="6266383" y="1874520"/>
-            <a:ext cx="2514600" cy="411480"/>
+            <a:off x="7555687" y="2834640"/>
+            <a:ext cx="1691640" cy="457200"/>
           </a:xfrm>
           <a:prstGeom prst="rect">
             <a:avLst/>
@@ -3651,31 +4229,623 @@
               <a:buNone/>
             </a:pPr>
             <a:r>
-              <a:rPr lang="he-IL" altLang="en-US" sz="1500" b="1" dirty="0">
-                <a:solidFill>
-                  <a:schemeClr val="accent4"/>
-                </a:solidFill>
-              </a:rPr>
-              <a:t>רבעון 2</a:t>
+              <a:rPr lang="he-IL" altLang="en-US" sz="1700" b="1" dirty="0">
+                <a:solidFill>
+                  <a:schemeClr val="accent2"/>
+                </a:solidFill>
+              </a:rPr>
+              <a:t>סוכן מתאם</a:t>
+            </a:r>
+            <a:endParaRPr lang="he-IL" sz="1700" dirty="0"/>
+          </a:p>
+        </p:txBody>
+      </p:sp>
+      <p:sp>
+        <p:nvSpPr>
+          <p:cNvPr id="13" name="Text 8"/>
+          <p:cNvSpPr txBox="1"/>
+          <p:nvPr/>
+        </p:nvSpPr>
+        <p:spPr>
+          <a:xfrm>
+            <a:off x="7601407" y="3337560"/>
+            <a:ext cx="1600200" cy="1463040"/>
+          </a:xfrm>
+          <a:prstGeom prst="rect">
+            <a:avLst/>
+          </a:prstGeom>
+          <a:noFill/>
+          <a:ln/>
+        </p:spPr>
+        <p:txBody>
+          <a:bodyPr wrap="square" rtlCol="0" anchor="t"/>
+          <a:lstStyle/>
+          <a:p>
+            <a:pPr rtl="1" algn="ctr" indent="0" marL="0">
+              <a:buNone/>
+            </a:pPr>
+            <a:r>
+              <a:rPr lang="he-IL" altLang="en-US" sz="1500" dirty="0">
+                <a:solidFill>
+                  <a:schemeClr val="bg1"/>
+                </a:solidFill>
+              </a:rPr>
+              <a:t>מפרק את השאלה ושולף נתונים מהקטלוג</a:t>
             </a:r>
             <a:endParaRPr lang="he-IL" sz="1500" dirty="0"/>
           </a:p>
         </p:txBody>
       </p:sp>
-      <p:sp>
-        <p:nvSpPr>
-          <p:cNvPr id="11" name="milestone card 2"/>
+      <p:pic>
+        <p:nvPicPr>
+          <p:cNvPr id="14" name="flow arrow 2" descr="חץ">    </p:cNvPr>
+          <p:cNvPicPr>
+            <a:picLocks noChangeAspect="1"/>
+          </p:cNvPicPr>
+          <p:nvPr/>
+        </p:nvPicPr>
+        <p:blipFill>
+          <a:blip r:embed="rId4"/>
+          <a:stretch>
+            <a:fillRect/>
+          </a:stretch>
+        </p:blipFill>
+        <p:spPr>
+          <a:xfrm>
+            <a:off x="7112203" y="3383280"/>
+            <a:ext cx="274320" cy="274320"/>
+          </a:xfrm>
+          <a:prstGeom prst="rect">
+            <a:avLst/>
+          </a:prstGeom>
+        </p:spPr>
+      </p:pic>
+      <p:sp>
+        <p:nvSpPr>
+          <p:cNvPr id="15" name="agent 1"/>
           <p:cNvSpPr/>
           <p:nvPr/>
         </p:nvSpPr>
         <p:spPr>
           <a:xfrm>
-            <a:off x="6266383" y="3291840"/>
-            <a:ext cx="2514600" cy="2377440"/>
+            <a:off x="5159959" y="1600200"/>
+            <a:ext cx="1874520" cy="1158240"/>
           </a:xfrm>
           <a:prstGeom prst="roundRect">
             <a:avLst>
-              <a:gd name="adj" fmla="val 4615"/>
+              <a:gd name="adj" fmla="val 9474"/>
+            </a:avLst>
+          </a:prstGeom>
+          <a:solidFill>
+            <a:schemeClr val="accent1"/>
+          </a:solidFill>
+          <a:ln w="12700">
+            <a:solidFill>
+              <a:schemeClr val="accent1"/>
+            </a:solidFill>
+            <a:prstDash val="solid"/>
+          </a:ln>
+        </p:spPr>
+      </p:sp>
+      <p:sp>
+        <p:nvSpPr>
+          <p:cNvPr id="16" name="סוכן אנשים circle"/>
+          <p:cNvSpPr/>
+          <p:nvPr/>
+        </p:nvSpPr>
+        <p:spPr>
+          <a:xfrm>
+            <a:off x="6394399" y="1932432"/>
+            <a:ext cx="502920" cy="502920"/>
+          </a:xfrm>
+          <a:prstGeom prst="ellipse">
+            <a:avLst/>
+          </a:prstGeom>
+          <a:solidFill>
+            <a:schemeClr val="tx2"/>
+          </a:solidFill>
+          <a:ln w="12700">
+            <a:solidFill>
+              <a:schemeClr val="tx2"/>
+            </a:solidFill>
+            <a:prstDash val="solid"/>
+          </a:ln>
+        </p:spPr>
+      </p:sp>
+      <p:pic>
+        <p:nvPicPr>
+          <p:cNvPr id="17" name="סוכן אנשים icon" descr="סוכן אנשים">    </p:cNvPr>
+          <p:cNvPicPr>
+            <a:picLocks noChangeAspect="1"/>
+          </p:cNvPicPr>
+          <p:nvPr/>
+        </p:nvPicPr>
+        <p:blipFill>
+          <a:blip r:embed="rId5"/>
+          <a:stretch>
+            <a:fillRect/>
+          </a:stretch>
+        </p:blipFill>
+        <p:spPr>
+          <a:xfrm>
+            <a:off x="6520129" y="2058162"/>
+            <a:ext cx="251460" cy="251460"/>
+          </a:xfrm>
+          <a:prstGeom prst="rect">
+            <a:avLst/>
+          </a:prstGeom>
+        </p:spPr>
+      </p:pic>
+      <p:sp>
+        <p:nvSpPr>
+          <p:cNvPr id="18" name="Text 11"/>
+          <p:cNvSpPr txBox="1"/>
+          <p:nvPr/>
+        </p:nvSpPr>
+        <p:spPr>
+          <a:xfrm>
+            <a:off x="5205679" y="1950720"/>
+            <a:ext cx="1143000" cy="457200"/>
+          </a:xfrm>
+          <a:prstGeom prst="rect">
+            <a:avLst/>
+          </a:prstGeom>
+          <a:noFill/>
+          <a:ln/>
+        </p:spPr>
+        <p:txBody>
+          <a:bodyPr wrap="square" rtlCol="0" anchor="ctr"/>
+          <a:lstStyle/>
+          <a:p>
+            <a:pPr rtl="1" algn="r" indent="0" marL="0">
+              <a:buNone/>
+            </a:pPr>
+            <a:r>
+              <a:rPr lang="he-IL" altLang="en-US" sz="1500" b="1" dirty="0">
+                <a:solidFill>
+                  <a:schemeClr val="bg1"/>
+                </a:solidFill>
+              </a:rPr>
+              <a:t>סוכן אנשים</a:t>
+            </a:r>
+            <a:endParaRPr lang="he-IL" sz="1500" dirty="0"/>
+          </a:p>
+        </p:txBody>
+      </p:sp>
+      <p:sp>
+        <p:nvSpPr>
+          <p:cNvPr id="19" name="agent 2"/>
+          <p:cNvSpPr/>
+          <p:nvPr/>
+        </p:nvSpPr>
+        <p:spPr>
+          <a:xfrm>
+            <a:off x="5159959" y="2941320"/>
+            <a:ext cx="1874520" cy="1158240"/>
+          </a:xfrm>
+          <a:prstGeom prst="roundRect">
+            <a:avLst>
+              <a:gd name="adj" fmla="val 9474"/>
+            </a:avLst>
+          </a:prstGeom>
+          <a:solidFill>
+            <a:schemeClr val="accent1"/>
+          </a:solidFill>
+          <a:ln w="12700">
+            <a:solidFill>
+              <a:schemeClr val="accent1"/>
+            </a:solidFill>
+            <a:prstDash val="solid"/>
+          </a:ln>
+        </p:spPr>
+      </p:sp>
+      <p:sp>
+        <p:nvSpPr>
+          <p:cNvPr id="20" name="סוכן כלים circle"/>
+          <p:cNvSpPr/>
+          <p:nvPr/>
+        </p:nvSpPr>
+        <p:spPr>
+          <a:xfrm>
+            <a:off x="6394399" y="3273552"/>
+            <a:ext cx="502920" cy="502920"/>
+          </a:xfrm>
+          <a:prstGeom prst="ellipse">
+            <a:avLst/>
+          </a:prstGeom>
+          <a:solidFill>
+            <a:schemeClr val="tx2"/>
+          </a:solidFill>
+          <a:ln w="12700">
+            <a:solidFill>
+              <a:schemeClr val="tx2"/>
+            </a:solidFill>
+            <a:prstDash val="solid"/>
+          </a:ln>
+        </p:spPr>
+      </p:sp>
+      <p:pic>
+        <p:nvPicPr>
+          <p:cNvPr id="21" name="סוכן כלים icon" descr="סוכן כלים">    </p:cNvPr>
+          <p:cNvPicPr>
+            <a:picLocks noChangeAspect="1"/>
+          </p:cNvPicPr>
+          <p:nvPr/>
+        </p:nvPicPr>
+        <p:blipFill>
+          <a:blip r:embed="rId6"/>
+          <a:stretch>
+            <a:fillRect/>
+          </a:stretch>
+        </p:blipFill>
+        <p:spPr>
+          <a:xfrm>
+            <a:off x="6520129" y="3399282"/>
+            <a:ext cx="251460" cy="251460"/>
+          </a:xfrm>
+          <a:prstGeom prst="rect">
+            <a:avLst/>
+          </a:prstGeom>
+        </p:spPr>
+      </p:pic>
+      <p:sp>
+        <p:nvSpPr>
+          <p:cNvPr id="22" name="Text 14"/>
+          <p:cNvSpPr txBox="1"/>
+          <p:nvPr/>
+        </p:nvSpPr>
+        <p:spPr>
+          <a:xfrm>
+            <a:off x="5205679" y="3291840"/>
+            <a:ext cx="1143000" cy="457200"/>
+          </a:xfrm>
+          <a:prstGeom prst="rect">
+            <a:avLst/>
+          </a:prstGeom>
+          <a:noFill/>
+          <a:ln/>
+        </p:spPr>
+        <p:txBody>
+          <a:bodyPr wrap="square" rtlCol="0" anchor="ctr"/>
+          <a:lstStyle/>
+          <a:p>
+            <a:pPr rtl="1" algn="r" indent="0" marL="0">
+              <a:buNone/>
+            </a:pPr>
+            <a:r>
+              <a:rPr lang="he-IL" altLang="en-US" sz="1500" b="1" dirty="0">
+                <a:solidFill>
+                  <a:schemeClr val="bg1"/>
+                </a:solidFill>
+              </a:rPr>
+              <a:t>סוכן כלים</a:t>
+            </a:r>
+            <a:endParaRPr lang="he-IL" sz="1500" dirty="0"/>
+          </a:p>
+        </p:txBody>
+      </p:sp>
+      <p:sp>
+        <p:nvSpPr>
+          <p:cNvPr id="23" name="agent 3"/>
+          <p:cNvSpPr/>
+          <p:nvPr/>
+        </p:nvSpPr>
+        <p:spPr>
+          <a:xfrm>
+            <a:off x="5159959" y="4282440"/>
+            <a:ext cx="1874520" cy="1158240"/>
+          </a:xfrm>
+          <a:prstGeom prst="roundRect">
+            <a:avLst>
+              <a:gd name="adj" fmla="val 9474"/>
+            </a:avLst>
+          </a:prstGeom>
+          <a:solidFill>
+            <a:schemeClr val="accent1"/>
+          </a:solidFill>
+          <a:ln w="12700">
+            <a:solidFill>
+              <a:schemeClr val="accent1"/>
+            </a:solidFill>
+            <a:prstDash val="solid"/>
+          </a:ln>
+        </p:spPr>
+      </p:sp>
+      <p:sp>
+        <p:nvSpPr>
+          <p:cNvPr id="24" name="סוכן חשמל circle"/>
+          <p:cNvSpPr/>
+          <p:nvPr/>
+        </p:nvSpPr>
+        <p:spPr>
+          <a:xfrm>
+            <a:off x="6394399" y="4614672"/>
+            <a:ext cx="502920" cy="502920"/>
+          </a:xfrm>
+          <a:prstGeom prst="ellipse">
+            <a:avLst/>
+          </a:prstGeom>
+          <a:solidFill>
+            <a:schemeClr val="tx2"/>
+          </a:solidFill>
+          <a:ln w="12700">
+            <a:solidFill>
+              <a:schemeClr val="tx2"/>
+            </a:solidFill>
+            <a:prstDash val="solid"/>
+          </a:ln>
+        </p:spPr>
+      </p:sp>
+      <p:pic>
+        <p:nvPicPr>
+          <p:cNvPr id="25" name="סוכן חשמל icon" descr="סוכן חשמל">    </p:cNvPr>
+          <p:cNvPicPr>
+            <a:picLocks noChangeAspect="1"/>
+          </p:cNvPicPr>
+          <p:nvPr/>
+        </p:nvPicPr>
+        <p:blipFill>
+          <a:blip r:embed="rId7"/>
+          <a:stretch>
+            <a:fillRect/>
+          </a:stretch>
+        </p:blipFill>
+        <p:spPr>
+          <a:xfrm>
+            <a:off x="6520129" y="4740402"/>
+            <a:ext cx="251460" cy="251460"/>
+          </a:xfrm>
+          <a:prstGeom prst="rect">
+            <a:avLst/>
+          </a:prstGeom>
+        </p:spPr>
+      </p:pic>
+      <p:sp>
+        <p:nvSpPr>
+          <p:cNvPr id="26" name="Text 17"/>
+          <p:cNvSpPr txBox="1"/>
+          <p:nvPr/>
+        </p:nvSpPr>
+        <p:spPr>
+          <a:xfrm>
+            <a:off x="5205679" y="4632960"/>
+            <a:ext cx="1143000" cy="457200"/>
+          </a:xfrm>
+          <a:prstGeom prst="rect">
+            <a:avLst/>
+          </a:prstGeom>
+          <a:noFill/>
+          <a:ln/>
+        </p:spPr>
+        <p:txBody>
+          <a:bodyPr wrap="square" rtlCol="0" anchor="ctr"/>
+          <a:lstStyle/>
+          <a:p>
+            <a:pPr rtl="1" algn="r" indent="0" marL="0">
+              <a:buNone/>
+            </a:pPr>
+            <a:r>
+              <a:rPr lang="he-IL" altLang="en-US" sz="1500" b="1" dirty="0">
+                <a:solidFill>
+                  <a:schemeClr val="bg1"/>
+                </a:solidFill>
+              </a:rPr>
+              <a:t>סוכן חשמל</a:t>
+            </a:r>
+            <a:endParaRPr lang="he-IL" sz="1500" dirty="0"/>
+          </a:p>
+        </p:txBody>
+      </p:sp>
+      <p:pic>
+        <p:nvPicPr>
+          <p:cNvPr id="27" name="flow arrow 3" descr="חץ">    </p:cNvPr>
+          <p:cNvPicPr>
+            <a:picLocks noChangeAspect="1"/>
+          </p:cNvPicPr>
+          <p:nvPr/>
+        </p:nvPicPr>
+        <p:blipFill>
+          <a:blip r:embed="rId8"/>
+          <a:stretch>
+            <a:fillRect/>
+          </a:stretch>
+        </p:blipFill>
+        <p:spPr>
+          <a:xfrm>
+            <a:off x="4807915" y="3383280"/>
+            <a:ext cx="274320" cy="274320"/>
+          </a:xfrm>
+          <a:prstGeom prst="rect">
+            <a:avLst/>
+          </a:prstGeom>
+        </p:spPr>
+      </p:pic>
+      <p:sp>
+        <p:nvSpPr>
+          <p:cNvPr id="28" name="profit agent"/>
+          <p:cNvSpPr/>
+          <p:nvPr/>
+        </p:nvSpPr>
+        <p:spPr>
+          <a:xfrm>
+            <a:off x="2855671" y="1600200"/>
+            <a:ext cx="1874520" cy="3840480"/>
+          </a:xfrm>
+          <a:prstGeom prst="roundRect">
+            <a:avLst>
+              <a:gd name="adj" fmla="val 5854"/>
+            </a:avLst>
+          </a:prstGeom>
+          <a:solidFill>
+            <a:srgbClr val="FBF1D3"/>
+          </a:solidFill>
+          <a:ln w="12700">
+            <a:solidFill>
+              <a:srgbClr val="FBF1D3"/>
+            </a:solidFill>
+            <a:prstDash val="solid"/>
+          </a:ln>
+        </p:spPr>
+      </p:sp>
+      <p:sp>
+        <p:nvSpPr>
+          <p:cNvPr id="29" name="מבחן רווח circle"/>
+          <p:cNvSpPr/>
+          <p:nvPr/>
+        </p:nvSpPr>
+        <p:spPr>
+          <a:xfrm>
+            <a:off x="3381451" y="1874520"/>
+            <a:ext cx="822960" cy="822960"/>
+          </a:xfrm>
+          <a:prstGeom prst="ellipse">
+            <a:avLst/>
+          </a:prstGeom>
+          <a:solidFill>
+            <a:schemeClr val="tx2"/>
+          </a:solidFill>
+          <a:ln w="12700">
+            <a:solidFill>
+              <a:schemeClr val="tx2"/>
+            </a:solidFill>
+            <a:prstDash val="solid"/>
+          </a:ln>
+        </p:spPr>
+      </p:sp>
+      <p:pic>
+        <p:nvPicPr>
+          <p:cNvPr id="30" name="מבחן רווח icon" descr="מבחן רווח">    </p:cNvPr>
+          <p:cNvPicPr>
+            <a:picLocks noChangeAspect="1"/>
+          </p:cNvPicPr>
+          <p:nvPr/>
+        </p:nvPicPr>
+        <p:blipFill>
+          <a:blip r:embed="rId9"/>
+          <a:stretch>
+            <a:fillRect/>
+          </a:stretch>
+        </p:blipFill>
+        <p:spPr>
+          <a:xfrm>
+            <a:off x="3587191" y="2080260"/>
+            <a:ext cx="411480" cy="411480"/>
+          </a:xfrm>
+          <a:prstGeom prst="rect">
+            <a:avLst/>
+          </a:prstGeom>
+        </p:spPr>
+      </p:pic>
+      <p:sp>
+        <p:nvSpPr>
+          <p:cNvPr id="31" name="Text 20"/>
+          <p:cNvSpPr txBox="1"/>
+          <p:nvPr/>
+        </p:nvSpPr>
+        <p:spPr>
+          <a:xfrm>
+            <a:off x="2947111" y="2834640"/>
+            <a:ext cx="1691640" cy="457200"/>
+          </a:xfrm>
+          <a:prstGeom prst="rect">
+            <a:avLst/>
+          </a:prstGeom>
+          <a:noFill/>
+          <a:ln/>
+        </p:spPr>
+        <p:txBody>
+          <a:bodyPr wrap="square" rtlCol="0" anchor="ctr"/>
+          <a:lstStyle/>
+          <a:p>
+            <a:pPr rtl="1" algn="ctr" indent="0" marL="0">
+              <a:buNone/>
+            </a:pPr>
+            <a:r>
+              <a:rPr lang="he-IL" altLang="en-US" sz="1700" b="1" dirty="0">
+                <a:solidFill>
+                  <a:schemeClr val="tx2"/>
+                </a:solidFill>
+              </a:rPr>
+              <a:t>סוכן ״מבחן רווח״</a:t>
+            </a:r>
+            <a:endParaRPr lang="he-IL" sz="1700" dirty="0"/>
+          </a:p>
+        </p:txBody>
+      </p:sp>
+      <p:sp>
+        <p:nvSpPr>
+          <p:cNvPr id="32" name="Text 21"/>
+          <p:cNvSpPr txBox="1"/>
+          <p:nvPr/>
+        </p:nvSpPr>
+        <p:spPr>
+          <a:xfrm>
+            <a:off x="2992831" y="3337560"/>
+            <a:ext cx="1600200" cy="1463040"/>
+          </a:xfrm>
+          <a:prstGeom prst="rect">
+            <a:avLst/>
+          </a:prstGeom>
+          <a:noFill/>
+          <a:ln/>
+        </p:spPr>
+        <p:txBody>
+          <a:bodyPr wrap="square" rtlCol="0" anchor="t"/>
+          <a:lstStyle/>
+          <a:p>
+            <a:pPr rtl="1" algn="ctr" indent="0" marL="0">
+              <a:buNone/>
+            </a:pPr>
+            <a:r>
+              <a:rPr lang="he-IL" altLang="en-US" sz="1500" dirty="0">
+                <a:solidFill>
+                  <a:schemeClr val="tx1"/>
+                </a:solidFill>
+              </a:rPr>
+              <a:t>מסנן המלצות שפוגעות בהכנסות או ב-SLA</a:t>
+            </a:r>
+            <a:endParaRPr lang="he-IL" sz="1500" dirty="0"/>
+          </a:p>
+        </p:txBody>
+      </p:sp>
+      <p:pic>
+        <p:nvPicPr>
+          <p:cNvPr id="33" name="flow arrow 4" descr="חץ">    </p:cNvPr>
+          <p:cNvPicPr>
+            <a:picLocks noChangeAspect="1"/>
+          </p:cNvPicPr>
+          <p:nvPr/>
+        </p:nvPicPr>
+        <p:blipFill>
+          <a:blip r:embed="rId10"/>
+          <a:stretch>
+            <a:fillRect/>
+          </a:stretch>
+        </p:blipFill>
+        <p:spPr>
+          <a:xfrm>
+            <a:off x="2503627" y="3383280"/>
+            <a:ext cx="274320" cy="274320"/>
+          </a:xfrm>
+          <a:prstGeom prst="rect">
+            <a:avLst/>
+          </a:prstGeom>
+        </p:spPr>
+      </p:pic>
+      <p:sp>
+        <p:nvSpPr>
+          <p:cNvPr id="34" name="action"/>
+          <p:cNvSpPr/>
+          <p:nvPr/>
+        </p:nvSpPr>
+        <p:spPr>
+          <a:xfrm>
+            <a:off x="551383" y="1600200"/>
+            <a:ext cx="1874520" cy="3840480"/>
+          </a:xfrm>
+          <a:prstGeom prst="roundRect">
+            <a:avLst>
+              <a:gd name="adj" fmla="val 5854"/>
             </a:avLst>
           </a:prstGeom>
           <a:solidFill>
@@ -3691,86 +4861,14 @@
       </p:sp>
       <p:sp>
         <p:nvSpPr>
-          <p:cNvPr id="12" name="Text 10"/>
-          <p:cNvSpPr txBox="1"/>
-          <p:nvPr/>
-        </p:nvSpPr>
-        <p:spPr>
-          <a:xfrm>
-            <a:off x="6449263" y="3429000"/>
-            <a:ext cx="2148840" cy="502920"/>
-          </a:xfrm>
-          <a:prstGeom prst="rect">
-            <a:avLst/>
-          </a:prstGeom>
-          <a:noFill/>
-          <a:ln/>
-        </p:spPr>
-        <p:txBody>
-          <a:bodyPr wrap="square" rtlCol="0" anchor="ctr"/>
-          <a:lstStyle/>
-          <a:p>
-            <a:pPr rtl="1" algn="ctr" indent="0" marL="0">
-              <a:buNone/>
-            </a:pPr>
-            <a:r>
-              <a:rPr lang="he-IL" altLang="en-US" sz="2200" b="1" dirty="0">
-                <a:solidFill>
-                  <a:schemeClr val="tx2"/>
-                </a:solidFill>
-              </a:rPr>
-              <a:t>פיילוט</a:t>
-            </a:r>
-            <a:endParaRPr lang="he-IL" sz="2200" dirty="0"/>
-          </a:p>
-        </p:txBody>
-      </p:sp>
-      <p:sp>
-        <p:nvSpPr>
-          <p:cNvPr id="13" name="Text 11"/>
-          <p:cNvSpPr txBox="1"/>
-          <p:nvPr/>
-        </p:nvSpPr>
-        <p:spPr>
-          <a:xfrm>
-            <a:off x="6449263" y="3977640"/>
-            <a:ext cx="2148840" cy="1554480"/>
-          </a:xfrm>
-          <a:prstGeom prst="rect">
-            <a:avLst/>
-          </a:prstGeom>
-          <a:noFill/>
-          <a:ln/>
-        </p:spPr>
-        <p:txBody>
-          <a:bodyPr wrap="square" rtlCol="0" anchor="t"/>
-          <a:lstStyle/>
-          <a:p>
-            <a:pPr rtl="1" algn="ctr" indent="0" marL="0">
-              <a:buNone/>
-            </a:pPr>
-            <a:r>
-              <a:rPr lang="he-IL" altLang="en-US" sz="1500" dirty="0">
-                <a:solidFill>
-                  <a:schemeClr val="tx1"/>
-                </a:solidFill>
-              </a:rPr>
-              <a:t>2 ארגונים, מדידת חיסכון מאומת מול קו בסיס</a:t>
-            </a:r>
-            <a:endParaRPr lang="he-IL" sz="1500" dirty="0"/>
-          </a:p>
-        </p:txBody>
-      </p:sp>
-      <p:sp>
-        <p:nvSpPr>
-          <p:cNvPr id="14" name="milestone 3"/>
+          <p:cNvPr id="35" name="פעולה circle"/>
           <p:cNvSpPr/>
           <p:nvPr/>
         </p:nvSpPr>
         <p:spPr>
           <a:xfrm>
-            <a:off x="4387291" y="2468880"/>
-            <a:ext cx="548640" cy="548640"/>
+            <a:off x="1077163" y="1874520"/>
+            <a:ext cx="822960" cy="822960"/>
           </a:xfrm>
           <a:prstGeom prst="ellipse">
             <a:avLst/>
@@ -3778,24 +4876,48 @@
           <a:solidFill>
             <a:schemeClr val="accent1"/>
           </a:solidFill>
-          <a:ln w="25400">
+          <a:ln w="12700">
             <a:solidFill>
-              <a:srgbClr val="FFFFFF"/>
+              <a:schemeClr val="accent1"/>
             </a:solidFill>
             <a:prstDash val="solid"/>
           </a:ln>
         </p:spPr>
       </p:sp>
-      <p:sp>
-        <p:nvSpPr>
-          <p:cNvPr id="15" name="Text 13"/>
+      <p:pic>
+        <p:nvPicPr>
+          <p:cNvPr id="36" name="פעולה icon" descr="פעולה">    </p:cNvPr>
+          <p:cNvPicPr>
+            <a:picLocks noChangeAspect="1"/>
+          </p:cNvPicPr>
+          <p:nvPr/>
+        </p:nvPicPr>
+        <p:blipFill>
+          <a:blip r:embed="rId11"/>
+          <a:stretch>
+            <a:fillRect/>
+          </a:stretch>
+        </p:blipFill>
+        <p:spPr>
+          <a:xfrm>
+            <a:off x="1282903" y="2080260"/>
+            <a:ext cx="411480" cy="411480"/>
+          </a:xfrm>
+          <a:prstGeom prst="rect">
+            <a:avLst/>
+          </a:prstGeom>
+        </p:spPr>
+      </p:pic>
+      <p:sp>
+        <p:nvSpPr>
+          <p:cNvPr id="37" name="Text 24"/>
           <p:cNvSpPr txBox="1"/>
           <p:nvPr/>
         </p:nvSpPr>
         <p:spPr>
           <a:xfrm>
-            <a:off x="3404311" y="1874520"/>
-            <a:ext cx="2514600" cy="411480"/>
+            <a:off x="642823" y="2834640"/>
+            <a:ext cx="1691640" cy="457200"/>
           </a:xfrm>
           <a:prstGeom prst="rect">
             <a:avLst/>
@@ -3811,12 +4933,48 @@
               <a:buNone/>
             </a:pPr>
             <a:r>
-              <a:rPr lang="he-IL" altLang="en-US" sz="1500" b="1" dirty="0">
-                <a:solidFill>
-                  <a:schemeClr val="accent4"/>
-                </a:solidFill>
-              </a:rPr>
-              <a:t>רבעון 3</a:t>
+              <a:rPr lang="he-IL" altLang="en-US" sz="1700" b="1" dirty="0">
+                <a:solidFill>
+                  <a:schemeClr val="tx2"/>
+                </a:solidFill>
+              </a:rPr>
+              <a:t>המלצה ופעולה</a:t>
+            </a:r>
+            <a:endParaRPr lang="he-IL" sz="1700" dirty="0"/>
+          </a:p>
+        </p:txBody>
+      </p:sp>
+      <p:sp>
+        <p:nvSpPr>
+          <p:cNvPr id="38" name="Text 25"/>
+          <p:cNvSpPr txBox="1"/>
+          <p:nvPr/>
+        </p:nvSpPr>
+        <p:spPr>
+          <a:xfrm>
+            <a:off x="688543" y="3337560"/>
+            <a:ext cx="1600200" cy="1737360"/>
+          </a:xfrm>
+          <a:prstGeom prst="rect">
+            <a:avLst/>
+          </a:prstGeom>
+          <a:noFill/>
+          <a:ln/>
+        </p:spPr>
+        <p:txBody>
+          <a:bodyPr wrap="square" rtlCol="0" anchor="t"/>
+          <a:lstStyle/>
+          <a:p>
+            <a:pPr rtl="1" algn="ctr" indent="0" marL="0">
+              <a:buNone/>
+            </a:pPr>
+            <a:r>
+              <a:rPr lang="he-IL" altLang="en-US" sz="1500" dirty="0">
+                <a:solidFill>
+                  <a:schemeClr val="tx1"/>
+                </a:solidFill>
+              </a:rPr>
+              <a:t>אחרי אישור המנהל: קריאת שירות, ביטול רישיון, כיבוי שרת</a:t>
             </a:r>
             <a:endParaRPr lang="he-IL" sz="1500" dirty="0"/>
           </a:p>
@@ -3824,41 +4982,14 @@
       </p:sp>
       <p:sp>
         <p:nvSpPr>
-          <p:cNvPr id="16" name="milestone card 3"/>
-          <p:cNvSpPr/>
-          <p:nvPr/>
-        </p:nvSpPr>
-        <p:spPr>
-          <a:xfrm>
-            <a:off x="3404311" y="3291840"/>
-            <a:ext cx="2514600" cy="2377440"/>
-          </a:xfrm>
-          <a:prstGeom prst="roundRect">
-            <a:avLst>
-              <a:gd name="adj" fmla="val 4615"/>
-            </a:avLst>
-          </a:prstGeom>
-          <a:solidFill>
-            <a:schemeClr val="bg2"/>
-          </a:solidFill>
-          <a:ln w="12700">
-            <a:solidFill>
-              <a:schemeClr val="bg2"/>
-            </a:solidFill>
-            <a:prstDash val="solid"/>
-          </a:ln>
-        </p:spPr>
-      </p:sp>
-      <p:sp>
-        <p:nvSpPr>
-          <p:cNvPr id="17" name="Text 15"/>
+          <p:cNvPr id="39" name="Text 26"/>
           <p:cNvSpPr txBox="1"/>
           <p:nvPr/>
         </p:nvSpPr>
         <p:spPr>
           <a:xfrm>
-            <a:off x="3587191" y="3429000"/>
-            <a:ext cx="2148840" cy="502920"/>
+            <a:off x="548640" y="5669280"/>
+            <a:ext cx="11091672" cy="457200"/>
           </a:xfrm>
           <a:prstGeom prst="rect">
             <a:avLst/>
@@ -3870,214 +5001,18 @@
           <a:bodyPr wrap="square" rtlCol="0" anchor="ctr"/>
           <a:lstStyle/>
           <a:p>
-            <a:pPr rtl="1" algn="ctr" indent="0" marL="0">
-              <a:buNone/>
-            </a:pPr>
-            <a:r>
-              <a:rPr lang="he-IL" altLang="en-US" sz="2200" b="1" dirty="0">
-                <a:solidFill>
-                  <a:schemeClr val="tx2"/>
-                </a:solidFill>
-              </a:rPr>
-              <a:t>מנוע אנשים</a:t>
-            </a:r>
-            <a:endParaRPr lang="he-IL" sz="2200" dirty="0"/>
-          </a:p>
-        </p:txBody>
-      </p:sp>
-      <p:sp>
-        <p:nvSpPr>
-          <p:cNvPr id="18" name="Text 16"/>
-          <p:cNvSpPr txBox="1"/>
-          <p:nvPr/>
-        </p:nvSpPr>
-        <p:spPr>
-          <a:xfrm>
-            <a:off x="3587191" y="3977640"/>
-            <a:ext cx="2148840" cy="1554480"/>
-          </a:xfrm>
-          <a:prstGeom prst="rect">
-            <a:avLst/>
-          </a:prstGeom>
-          <a:noFill/>
-          <a:ln/>
-        </p:spPr>
-        <p:txBody>
-          <a:bodyPr wrap="square" rtlCol="0" anchor="t"/>
-          <a:lstStyle/>
-          <a:p>
-            <a:pPr rtl="1" algn="ctr" indent="0" marL="0">
-              <a:buNone/>
-            </a:pPr>
-            <a:r>
-              <a:rPr lang="he-IL" altLang="en-US" sz="1500" dirty="0">
-                <a:solidFill>
-                  <a:schemeClr val="tx1"/>
-                </a:solidFill>
-              </a:rPr>
-              <a:t>הוספת ניתוח כפילויות משימות עם watsonx.governance</a:t>
-            </a:r>
-            <a:endParaRPr lang="he-IL" sz="1500" dirty="0"/>
-          </a:p>
-        </p:txBody>
-      </p:sp>
-      <p:sp>
-        <p:nvSpPr>
-          <p:cNvPr id="19" name="milestone 4"/>
-          <p:cNvSpPr/>
-          <p:nvPr/>
-        </p:nvSpPr>
-        <p:spPr>
-          <a:xfrm>
-            <a:off x="1525219" y="2468880"/>
-            <a:ext cx="548640" cy="548640"/>
-          </a:xfrm>
-          <a:prstGeom prst="ellipse">
-            <a:avLst/>
-          </a:prstGeom>
-          <a:solidFill>
-            <a:schemeClr val="accent1"/>
-          </a:solidFill>
-          <a:ln w="25400">
-            <a:solidFill>
-              <a:srgbClr val="FFFFFF"/>
-            </a:solidFill>
-            <a:prstDash val="solid"/>
-          </a:ln>
-        </p:spPr>
-      </p:sp>
-      <p:sp>
-        <p:nvSpPr>
-          <p:cNvPr id="20" name="Text 18"/>
-          <p:cNvSpPr txBox="1"/>
-          <p:nvPr/>
-        </p:nvSpPr>
-        <p:spPr>
-          <a:xfrm>
-            <a:off x="542239" y="1874520"/>
-            <a:ext cx="2514600" cy="411480"/>
-          </a:xfrm>
-          <a:prstGeom prst="rect">
-            <a:avLst/>
-          </a:prstGeom>
-          <a:noFill/>
-          <a:ln/>
-        </p:spPr>
-        <p:txBody>
-          <a:bodyPr wrap="square" rtlCol="0" anchor="ctr"/>
-          <a:lstStyle/>
-          <a:p>
-            <a:pPr rtl="1" algn="ctr" indent="0" marL="0">
-              <a:buNone/>
-            </a:pPr>
-            <a:r>
-              <a:rPr lang="he-IL" altLang="en-US" sz="1500" b="1" dirty="0">
-                <a:solidFill>
-                  <a:schemeClr val="accent4"/>
-                </a:solidFill>
-              </a:rPr>
-              <a:t>רבעון 4</a:t>
-            </a:r>
-            <a:endParaRPr lang="he-IL" sz="1500" dirty="0"/>
-          </a:p>
-        </p:txBody>
-      </p:sp>
-      <p:sp>
-        <p:nvSpPr>
-          <p:cNvPr id="21" name="milestone card 4"/>
-          <p:cNvSpPr/>
-          <p:nvPr/>
-        </p:nvSpPr>
-        <p:spPr>
-          <a:xfrm>
-            <a:off x="542239" y="3291840"/>
-            <a:ext cx="2514600" cy="2377440"/>
-          </a:xfrm>
-          <a:prstGeom prst="roundRect">
-            <a:avLst>
-              <a:gd name="adj" fmla="val 4615"/>
-            </a:avLst>
-          </a:prstGeom>
-          <a:solidFill>
-            <a:schemeClr val="bg2"/>
-          </a:solidFill>
-          <a:ln w="12700">
-            <a:solidFill>
-              <a:schemeClr val="bg2"/>
-            </a:solidFill>
-            <a:prstDash val="solid"/>
-          </a:ln>
-        </p:spPr>
-      </p:sp>
-      <p:sp>
-        <p:nvSpPr>
-          <p:cNvPr id="22" name="Text 20"/>
-          <p:cNvSpPr txBox="1"/>
-          <p:nvPr/>
-        </p:nvSpPr>
-        <p:spPr>
-          <a:xfrm>
-            <a:off x="725119" y="3429000"/>
-            <a:ext cx="2148840" cy="502920"/>
-          </a:xfrm>
-          <a:prstGeom prst="rect">
-            <a:avLst/>
-          </a:prstGeom>
-          <a:noFill/>
-          <a:ln/>
-        </p:spPr>
-        <p:txBody>
-          <a:bodyPr wrap="square" rtlCol="0" anchor="ctr"/>
-          <a:lstStyle/>
-          <a:p>
-            <a:pPr rtl="1" algn="ctr" indent="0" marL="0">
-              <a:buNone/>
-            </a:pPr>
-            <a:r>
-              <a:rPr lang="he-IL" altLang="en-US" sz="2200" b="1" dirty="0">
-                <a:solidFill>
-                  <a:schemeClr val="tx2"/>
-                </a:solidFill>
-              </a:rPr>
-              <a:t>השקה</a:t>
-            </a:r>
-            <a:endParaRPr lang="he-IL" sz="2200" dirty="0"/>
-          </a:p>
-        </p:txBody>
-      </p:sp>
-      <p:sp>
-        <p:nvSpPr>
-          <p:cNvPr id="23" name="Text 21"/>
-          <p:cNvSpPr txBox="1"/>
-          <p:nvPr/>
-        </p:nvSpPr>
-        <p:spPr>
-          <a:xfrm>
-            <a:off x="725119" y="3977640"/>
-            <a:ext cx="2148840" cy="1554480"/>
-          </a:xfrm>
-          <a:prstGeom prst="rect">
-            <a:avLst/>
-          </a:prstGeom>
-          <a:noFill/>
-          <a:ln/>
-        </p:spPr>
-        <p:txBody>
-          <a:bodyPr wrap="square" rtlCol="0" anchor="t"/>
-          <a:lstStyle/>
-          <a:p>
-            <a:pPr rtl="1" algn="ctr" indent="0" marL="0">
-              <a:buNone/>
-            </a:pPr>
-            <a:r>
-              <a:rPr lang="he-IL" altLang="en-US" sz="1500" dirty="0">
-                <a:solidFill>
-                  <a:schemeClr val="tx1"/>
-                </a:solidFill>
-              </a:rPr>
-              <a:t>הפצה דרך שותפי IBM ו-10 לקוחות משלמים</a:t>
-            </a:r>
-            <a:endParaRPr lang="he-IL" sz="1500" dirty="0"/>
+            <a:pPr rtl="1" algn="r" indent="0" marL="0">
+              <a:buNone/>
+            </a:pPr>
+            <a:r>
+              <a:rPr lang="he-IL" altLang="en-US" sz="1600" b="1" i="1" dirty="0">
+                <a:solidFill>
+                  <a:schemeClr val="accent1"/>
+                </a:solidFill>
+              </a:rPr>
+              <a:t>אדם מאשר כל פעולה (human-in-the-loop) · כל החלטה מתועדת ב-watsonx.governance</a:t>
+            </a:r>
+            <a:endParaRPr lang="he-IL" sz="1600" dirty="0"/>
           </a:p>
         </p:txBody>
       </p:sp>
@@ -4183,7 +5118,7 @@
                   <a:schemeClr val="tx2"/>
                 </a:solidFill>
               </a:rPr>
-              <a:t>הצוות</a:t>
+              <a:t>נבנה עם IBM Bob: מהר יותר, ובטוח יותר</a:t>
             </a:r>
             <a:endParaRPr lang="he-IL" sz="3200" dirty="0"/>
           </a:p>
@@ -4191,18 +5126,601 @@
       </p:sp>
       <p:sp>
         <p:nvSpPr>
-          <p:cNvPr id="3" name="team card 1"/>
+          <p:cNvPr id="3" name="מחברים לקטלוג circle"/>
           <p:cNvSpPr/>
           <p:nvPr/>
         </p:nvSpPr>
         <p:spPr>
           <a:xfrm>
-            <a:off x="8168335" y="1554480"/>
-            <a:ext cx="3474720" cy="4206240"/>
+            <a:off x="10865815" y="1463040"/>
+            <a:ext cx="777240" cy="777240"/>
+          </a:xfrm>
+          <a:prstGeom prst="ellipse">
+            <a:avLst/>
+          </a:prstGeom>
+          <a:solidFill>
+            <a:schemeClr val="tx2"/>
+          </a:solidFill>
+          <a:ln w="12700">
+            <a:solidFill>
+              <a:schemeClr val="tx2"/>
+            </a:solidFill>
+            <a:prstDash val="solid"/>
+          </a:ln>
+        </p:spPr>
+      </p:sp>
+      <p:pic>
+        <p:nvPicPr>
+          <p:cNvPr id="4" name="מחברים לקטלוג icon" descr="מחברים לקטלוג">    </p:cNvPr>
+          <p:cNvPicPr>
+            <a:picLocks noChangeAspect="1"/>
+          </p:cNvPicPr>
+          <p:nvPr/>
+        </p:nvPicPr>
+        <p:blipFill>
+          <a:blip r:embed="rId1"/>
+          <a:stretch>
+            <a:fillRect/>
+          </a:stretch>
+        </p:blipFill>
+        <p:spPr>
+          <a:xfrm>
+            <a:off x="11060125" y="1657350"/>
+            <a:ext cx="388620" cy="388620"/>
+          </a:xfrm>
+          <a:prstGeom prst="rect">
+            <a:avLst/>
+          </a:prstGeom>
+        </p:spPr>
+      </p:pic>
+      <p:sp>
+        <p:nvSpPr>
+          <p:cNvPr id="5" name="Text 2"/>
+          <p:cNvSpPr txBox="1"/>
+          <p:nvPr/>
+        </p:nvSpPr>
+        <p:spPr>
+          <a:xfrm>
+            <a:off x="5120640" y="1417320"/>
+            <a:ext cx="5577840" cy="411480"/>
+          </a:xfrm>
+          <a:prstGeom prst="rect">
+            <a:avLst/>
+          </a:prstGeom>
+          <a:noFill/>
+          <a:ln/>
+        </p:spPr>
+        <p:txBody>
+          <a:bodyPr wrap="square" rtlCol="0" anchor="ctr"/>
+          <a:lstStyle/>
+          <a:p>
+            <a:pPr rtl="1" algn="r" indent="0" marL="0">
+              <a:buNone/>
+            </a:pPr>
+            <a:r>
+              <a:rPr lang="he-IL" altLang="en-US" sz="1900" b="1" dirty="0">
+                <a:solidFill>
+                  <a:schemeClr val="tx2"/>
+                </a:solidFill>
+              </a:rPr>
+              <a:t>מחברים לקטלוג</a:t>
+            </a:r>
+            <a:endParaRPr lang="he-IL" sz="1900" dirty="0"/>
+          </a:p>
+        </p:txBody>
+      </p:sp>
+      <p:sp>
+        <p:nvSpPr>
+          <p:cNvPr id="6" name="Text 3"/>
+          <p:cNvSpPr txBox="1"/>
+          <p:nvPr/>
+        </p:nvSpPr>
+        <p:spPr>
+          <a:xfrm>
+            <a:off x="5120640" y="1810512"/>
+            <a:ext cx="5577840" cy="594360"/>
+          </a:xfrm>
+          <a:prstGeom prst="rect">
+            <a:avLst/>
+          </a:prstGeom>
+          <a:noFill/>
+          <a:ln/>
+        </p:spPr>
+        <p:txBody>
+          <a:bodyPr wrap="square" rtlCol="0" anchor="t"/>
+          <a:lstStyle/>
+          <a:p>
+            <a:pPr rtl="1" algn="r" indent="0" marL="0">
+              <a:buNone/>
+            </a:pPr>
+            <a:r>
+              <a:rPr lang="he-IL" altLang="en-US" sz="1500" dirty="0">
+                <a:solidFill>
+                  <a:schemeClr val="tx1"/>
+                </a:solidFill>
+              </a:rPr>
+              <a:t>כתיבה ובדיקה של המחברים מכל מקור נתונים אל הקטלוג</a:t>
+            </a:r>
+            <a:endParaRPr lang="he-IL" sz="1500" dirty="0"/>
+          </a:p>
+        </p:txBody>
+      </p:sp>
+      <p:sp>
+        <p:nvSpPr>
+          <p:cNvPr id="7" name="סוכנים ל-Orchestrate circle"/>
+          <p:cNvSpPr/>
+          <p:nvPr/>
+        </p:nvSpPr>
+        <p:spPr>
+          <a:xfrm>
+            <a:off x="10865815" y="2578608"/>
+            <a:ext cx="777240" cy="777240"/>
+          </a:xfrm>
+          <a:prstGeom prst="ellipse">
+            <a:avLst/>
+          </a:prstGeom>
+          <a:solidFill>
+            <a:schemeClr val="tx2"/>
+          </a:solidFill>
+          <a:ln w="12700">
+            <a:solidFill>
+              <a:schemeClr val="tx2"/>
+            </a:solidFill>
+            <a:prstDash val="solid"/>
+          </a:ln>
+        </p:spPr>
+      </p:sp>
+      <p:pic>
+        <p:nvPicPr>
+          <p:cNvPr id="8" name="סוכנים ל-Orchestrate icon" descr="סוכנים ל-Orchestrate">    </p:cNvPr>
+          <p:cNvPicPr>
+            <a:picLocks noChangeAspect="1"/>
+          </p:cNvPicPr>
+          <p:nvPr/>
+        </p:nvPicPr>
+        <p:blipFill>
+          <a:blip r:embed="rId2"/>
+          <a:stretch>
+            <a:fillRect/>
+          </a:stretch>
+        </p:blipFill>
+        <p:spPr>
+          <a:xfrm>
+            <a:off x="11060125" y="2772918"/>
+            <a:ext cx="388620" cy="388620"/>
+          </a:xfrm>
+          <a:prstGeom prst="rect">
+            <a:avLst/>
+          </a:prstGeom>
+        </p:spPr>
+      </p:pic>
+      <p:sp>
+        <p:nvSpPr>
+          <p:cNvPr id="9" name="Text 5"/>
+          <p:cNvSpPr txBox="1"/>
+          <p:nvPr/>
+        </p:nvSpPr>
+        <p:spPr>
+          <a:xfrm>
+            <a:off x="5120640" y="2532888"/>
+            <a:ext cx="5577840" cy="411480"/>
+          </a:xfrm>
+          <a:prstGeom prst="rect">
+            <a:avLst/>
+          </a:prstGeom>
+          <a:noFill/>
+          <a:ln/>
+        </p:spPr>
+        <p:txBody>
+          <a:bodyPr wrap="square" rtlCol="0" anchor="ctr"/>
+          <a:lstStyle/>
+          <a:p>
+            <a:pPr rtl="1" algn="r" indent="0" marL="0">
+              <a:buNone/>
+            </a:pPr>
+            <a:r>
+              <a:rPr lang="he-IL" altLang="en-US" sz="1900" b="1" dirty="0">
+                <a:solidFill>
+                  <a:schemeClr val="tx2"/>
+                </a:solidFill>
+              </a:rPr>
+              <a:t>סוכנים ל-Orchestrate</a:t>
+            </a:r>
+            <a:endParaRPr lang="he-IL" sz="1900" dirty="0"/>
+          </a:p>
+        </p:txBody>
+      </p:sp>
+      <p:sp>
+        <p:nvSpPr>
+          <p:cNvPr id="10" name="Text 6"/>
+          <p:cNvSpPr txBox="1"/>
+          <p:nvPr/>
+        </p:nvSpPr>
+        <p:spPr>
+          <a:xfrm>
+            <a:off x="5120640" y="2926080"/>
+            <a:ext cx="5577840" cy="594360"/>
+          </a:xfrm>
+          <a:prstGeom prst="rect">
+            <a:avLst/>
+          </a:prstGeom>
+          <a:noFill/>
+          <a:ln/>
+        </p:spPr>
+        <p:txBody>
+          <a:bodyPr wrap="square" rtlCol="0" anchor="t"/>
+          <a:lstStyle/>
+          <a:p>
+            <a:pPr rtl="1" algn="r" indent="0" marL="0">
+              <a:buNone/>
+            </a:pPr>
+            <a:r>
+              <a:rPr lang="he-IL" altLang="en-US" sz="1500" dirty="0">
+                <a:solidFill>
+                  <a:schemeClr val="tx1"/>
+                </a:solidFill>
+              </a:rPr>
+              <a:t>פיתוח הכלים והלוגיקה של כל סוכן, כולל בדיקות</a:t>
+            </a:r>
+            <a:endParaRPr lang="he-IL" sz="1500" dirty="0"/>
+          </a:p>
+        </p:txBody>
+      </p:sp>
+      <p:sp>
+        <p:nvSpPr>
+          <p:cNvPr id="11" name="אבטחה ומדיניות circle"/>
+          <p:cNvSpPr/>
+          <p:nvPr/>
+        </p:nvSpPr>
+        <p:spPr>
+          <a:xfrm>
+            <a:off x="10865815" y="3694176"/>
+            <a:ext cx="777240" cy="777240"/>
+          </a:xfrm>
+          <a:prstGeom prst="ellipse">
+            <a:avLst/>
+          </a:prstGeom>
+          <a:solidFill>
+            <a:schemeClr val="tx2"/>
+          </a:solidFill>
+          <a:ln w="12700">
+            <a:solidFill>
+              <a:schemeClr val="tx2"/>
+            </a:solidFill>
+            <a:prstDash val="solid"/>
+          </a:ln>
+        </p:spPr>
+      </p:sp>
+      <p:pic>
+        <p:nvPicPr>
+          <p:cNvPr id="12" name="אבטחה ומדיניות icon" descr="אבטחה ומדיניות">    </p:cNvPr>
+          <p:cNvPicPr>
+            <a:picLocks noChangeAspect="1"/>
+          </p:cNvPicPr>
+          <p:nvPr/>
+        </p:nvPicPr>
+        <p:blipFill>
+          <a:blip r:embed="rId3"/>
+          <a:stretch>
+            <a:fillRect/>
+          </a:stretch>
+        </p:blipFill>
+        <p:spPr>
+          <a:xfrm>
+            <a:off x="11060125" y="3888486"/>
+            <a:ext cx="388620" cy="388620"/>
+          </a:xfrm>
+          <a:prstGeom prst="rect">
+            <a:avLst/>
+          </a:prstGeom>
+        </p:spPr>
+      </p:pic>
+      <p:sp>
+        <p:nvSpPr>
+          <p:cNvPr id="13" name="Text 8"/>
+          <p:cNvSpPr txBox="1"/>
+          <p:nvPr/>
+        </p:nvSpPr>
+        <p:spPr>
+          <a:xfrm>
+            <a:off x="5120640" y="3648456"/>
+            <a:ext cx="5577840" cy="411480"/>
+          </a:xfrm>
+          <a:prstGeom prst="rect">
+            <a:avLst/>
+          </a:prstGeom>
+          <a:noFill/>
+          <a:ln/>
+        </p:spPr>
+        <p:txBody>
+          <a:bodyPr wrap="square" rtlCol="0" anchor="ctr"/>
+          <a:lstStyle/>
+          <a:p>
+            <a:pPr rtl="1" algn="r" indent="0" marL="0">
+              <a:buNone/>
+            </a:pPr>
+            <a:r>
+              <a:rPr lang="he-IL" altLang="en-US" sz="1900" b="1" dirty="0">
+                <a:solidFill>
+                  <a:schemeClr val="tx2"/>
+                </a:solidFill>
+              </a:rPr>
+              <a:t>אבטחה ומדיניות</a:t>
+            </a:r>
+            <a:endParaRPr lang="he-IL" sz="1900" dirty="0"/>
+          </a:p>
+        </p:txBody>
+      </p:sp>
+      <p:sp>
+        <p:nvSpPr>
+          <p:cNvPr id="14" name="Text 9"/>
+          <p:cNvSpPr txBox="1"/>
+          <p:nvPr/>
+        </p:nvSpPr>
+        <p:spPr>
+          <a:xfrm>
+            <a:off x="5120640" y="4041648"/>
+            <a:ext cx="5577840" cy="594360"/>
+          </a:xfrm>
+          <a:prstGeom prst="rect">
+            <a:avLst/>
+          </a:prstGeom>
+          <a:noFill/>
+          <a:ln/>
+        </p:spPr>
+        <p:txBody>
+          <a:bodyPr wrap="square" rtlCol="0" anchor="t"/>
+          <a:lstStyle/>
+          <a:p>
+            <a:pPr rtl="1" algn="r" indent="0" marL="0">
+              <a:buNone/>
+            </a:pPr>
+            <a:r>
+              <a:rPr lang="he-IL" altLang="en-US" sz="1500" dirty="0">
+                <a:solidFill>
+                  <a:schemeClr val="tx1"/>
+                </a:solidFill>
+              </a:rPr>
+              <a:t>סריקת מידע רגיש ואכיפת מדיניות מובנות — קריטי כשמנתחים נתוני עובדים</a:t>
+            </a:r>
+            <a:endParaRPr lang="he-IL" sz="1500" dirty="0"/>
+          </a:p>
+        </p:txBody>
+      </p:sp>
+      <p:sp>
+        <p:nvSpPr>
+          <p:cNvPr id="15" name="מודרניזציה אצל הלקוח circle"/>
+          <p:cNvSpPr/>
+          <p:nvPr/>
+        </p:nvSpPr>
+        <p:spPr>
+          <a:xfrm>
+            <a:off x="10865815" y="4809744"/>
+            <a:ext cx="777240" cy="777240"/>
+          </a:xfrm>
+          <a:prstGeom prst="ellipse">
+            <a:avLst/>
+          </a:prstGeom>
+          <a:solidFill>
+            <a:schemeClr val="tx2"/>
+          </a:solidFill>
+          <a:ln w="12700">
+            <a:solidFill>
+              <a:schemeClr val="tx2"/>
+            </a:solidFill>
+            <a:prstDash val="solid"/>
+          </a:ln>
+        </p:spPr>
+      </p:sp>
+      <p:pic>
+        <p:nvPicPr>
+          <p:cNvPr id="16" name="מודרניזציה אצל הלקוח icon" descr="מודרניזציה אצל הלקוח">    </p:cNvPr>
+          <p:cNvPicPr>
+            <a:picLocks noChangeAspect="1"/>
+          </p:cNvPicPr>
+          <p:nvPr/>
+        </p:nvPicPr>
+        <p:blipFill>
+          <a:blip r:embed="rId4"/>
+          <a:stretch>
+            <a:fillRect/>
+          </a:stretch>
+        </p:blipFill>
+        <p:spPr>
+          <a:xfrm>
+            <a:off x="11060125" y="5004054"/>
+            <a:ext cx="388620" cy="388620"/>
+          </a:xfrm>
+          <a:prstGeom prst="rect">
+            <a:avLst/>
+          </a:prstGeom>
+        </p:spPr>
+      </p:pic>
+      <p:sp>
+        <p:nvSpPr>
+          <p:cNvPr id="17" name="Text 11"/>
+          <p:cNvSpPr txBox="1"/>
+          <p:nvPr/>
+        </p:nvSpPr>
+        <p:spPr>
+          <a:xfrm>
+            <a:off x="5120640" y="4764024"/>
+            <a:ext cx="5577840" cy="411480"/>
+          </a:xfrm>
+          <a:prstGeom prst="rect">
+            <a:avLst/>
+          </a:prstGeom>
+          <a:noFill/>
+          <a:ln/>
+        </p:spPr>
+        <p:txBody>
+          <a:bodyPr wrap="square" rtlCol="0" anchor="ctr"/>
+          <a:lstStyle/>
+          <a:p>
+            <a:pPr rtl="1" algn="r" indent="0" marL="0">
+              <a:buNone/>
+            </a:pPr>
+            <a:r>
+              <a:rPr lang="he-IL" altLang="en-US" sz="1900" b="1" dirty="0">
+                <a:solidFill>
+                  <a:schemeClr val="tx2"/>
+                </a:solidFill>
+              </a:rPr>
+              <a:t>מודרניזציה אצל הלקוח</a:t>
+            </a:r>
+            <a:endParaRPr lang="he-IL" sz="1900" dirty="0"/>
+          </a:p>
+        </p:txBody>
+      </p:sp>
+      <p:sp>
+        <p:nvSpPr>
+          <p:cNvPr id="18" name="Text 12"/>
+          <p:cNvSpPr txBox="1"/>
+          <p:nvPr/>
+        </p:nvSpPr>
+        <p:spPr>
+          <a:xfrm>
+            <a:off x="5120640" y="5157216"/>
+            <a:ext cx="5577840" cy="594360"/>
+          </a:xfrm>
+          <a:prstGeom prst="rect">
+            <a:avLst/>
+          </a:prstGeom>
+          <a:noFill/>
+          <a:ln/>
+        </p:spPr>
+        <p:txBody>
+          <a:bodyPr wrap="square" rtlCol="0" anchor="t"/>
+          <a:lstStyle/>
+          <a:p>
+            <a:pPr rtl="1" algn="r" indent="0" marL="0">
+              <a:buNone/>
+            </a:pPr>
+            <a:r>
+              <a:rPr lang="he-IL" altLang="en-US" sz="1500" dirty="0">
+                <a:solidFill>
+                  <a:schemeClr val="tx1"/>
+                </a:solidFill>
+              </a:rPr>
+              <a:t>התאמת סקריפטים ומערכות ישנות של הלקוח כדי שיוכלו להתחבר</a:t>
+            </a:r>
+            <a:endParaRPr lang="he-IL" sz="1500" dirty="0"/>
+          </a:p>
+        </p:txBody>
+      </p:sp>
+      <p:sp>
+        <p:nvSpPr>
+          <p:cNvPr id="19" name="bob stat 1"/>
+          <p:cNvSpPr/>
+          <p:nvPr/>
+        </p:nvSpPr>
+        <p:spPr>
+          <a:xfrm>
+            <a:off x="548640" y="1463040"/>
+            <a:ext cx="4114800" cy="2194560"/>
           </a:xfrm>
           <a:prstGeom prst="roundRect">
             <a:avLst>
-              <a:gd name="adj" fmla="val 3158"/>
+              <a:gd name="adj" fmla="val 5000"/>
+            </a:avLst>
+          </a:prstGeom>
+          <a:solidFill>
+            <a:schemeClr val="tx2"/>
+          </a:solidFill>
+          <a:ln w="12700">
+            <a:solidFill>
+              <a:schemeClr val="tx2"/>
+            </a:solidFill>
+            <a:prstDash val="solid"/>
+          </a:ln>
+        </p:spPr>
+      </p:sp>
+      <p:sp>
+        <p:nvSpPr>
+          <p:cNvPr id="20" name="Text 14"/>
+          <p:cNvSpPr txBox="1"/>
+          <p:nvPr/>
+        </p:nvSpPr>
+        <p:spPr>
+          <a:xfrm>
+            <a:off x="731520" y="1600200"/>
+            <a:ext cx="3749040" cy="914400"/>
+          </a:xfrm>
+          <a:prstGeom prst="rect">
+            <a:avLst/>
+          </a:prstGeom>
+          <a:noFill/>
+          <a:ln/>
+        </p:spPr>
+        <p:txBody>
+          <a:bodyPr wrap="square" rtlCol="0" anchor="ctr"/>
+          <a:lstStyle/>
+          <a:p>
+            <a:pPr rtl="1" algn="ctr" indent="0" marL="0">
+              <a:buNone/>
+            </a:pPr>
+            <a:r>
+              <a:rPr lang="he-IL" altLang="en-US" sz="4000" b="1" dirty="0">
+                <a:solidFill>
+                  <a:schemeClr val="accent2"/>
+                </a:solidFill>
+              </a:rPr>
+              <a:t>12 שבועות</a:t>
+            </a:r>
+            <a:endParaRPr lang="he-IL" sz="4000" dirty="0"/>
+          </a:p>
+        </p:txBody>
+      </p:sp>
+      <p:sp>
+        <p:nvSpPr>
+          <p:cNvPr id="21" name="Text 15"/>
+          <p:cNvSpPr txBox="1"/>
+          <p:nvPr/>
+        </p:nvSpPr>
+        <p:spPr>
+          <a:xfrm>
+            <a:off x="731520" y="2560320"/>
+            <a:ext cx="3749040" cy="914400"/>
+          </a:xfrm>
+          <a:prstGeom prst="rect">
+            <a:avLst/>
+          </a:prstGeom>
+          <a:noFill/>
+          <a:ln/>
+        </p:spPr>
+        <p:txBody>
+          <a:bodyPr wrap="square" rtlCol="0" anchor="t"/>
+          <a:lstStyle/>
+          <a:p>
+            <a:pPr rtl="1" algn="ctr" indent="0" marL="0">
+              <a:buNone/>
+            </a:pPr>
+            <a:r>
+              <a:rPr lang="he-IL" altLang="en-US" sz="1600" dirty="0">
+                <a:solidFill>
+                  <a:schemeClr val="bg1"/>
+                </a:solidFill>
+              </a:rPr>
+              <a:t>היעד שלנו ל-MVP עובד, בזכות פיתוח עם Bob</a:t>
+            </a:r>
+            <a:endParaRPr lang="he-IL" sz="1600" dirty="0"/>
+          </a:p>
+        </p:txBody>
+      </p:sp>
+      <p:sp>
+        <p:nvSpPr>
+          <p:cNvPr id="22" name="bob stat 2"/>
+          <p:cNvSpPr/>
+          <p:nvPr/>
+        </p:nvSpPr>
+        <p:spPr>
+          <a:xfrm>
+            <a:off x="548640" y="3840480"/>
+            <a:ext cx="4114800" cy="2194560"/>
+          </a:xfrm>
+          <a:prstGeom prst="roundRect">
+            <a:avLst>
+              <a:gd name="adj" fmla="val 5000"/>
             </a:avLst>
           </a:prstGeom>
           <a:solidFill>
@@ -4218,63 +5736,14 @@
       </p:sp>
       <p:sp>
         <p:nvSpPr>
-          <p:cNvPr id="4" name="חבר/ת צוות 1 circle"/>
-          <p:cNvSpPr/>
-          <p:nvPr/>
-        </p:nvSpPr>
-        <p:spPr>
-          <a:xfrm>
-            <a:off x="9219895" y="1920240"/>
-            <a:ext cx="1371600" cy="1371600"/>
-          </a:xfrm>
-          <a:prstGeom prst="ellipse">
-            <a:avLst/>
-          </a:prstGeom>
-          <a:solidFill>
-            <a:schemeClr val="tx2"/>
-          </a:solidFill>
-          <a:ln w="12700">
-            <a:solidFill>
-              <a:schemeClr val="tx2"/>
-            </a:solidFill>
-            <a:prstDash val="solid"/>
-          </a:ln>
-        </p:spPr>
-      </p:sp>
-      <p:pic>
-        <p:nvPicPr>
-          <p:cNvPr id="5" name="חבר/ת צוות 1 icon" descr="חבר/ת צוות 1">    </p:cNvPr>
-          <p:cNvPicPr>
-            <a:picLocks noChangeAspect="1"/>
-          </p:cNvPicPr>
-          <p:nvPr/>
-        </p:nvPicPr>
-        <p:blipFill>
-          <a:blip r:embed="rId1"/>
-          <a:stretch>
-            <a:fillRect/>
-          </a:stretch>
-        </p:blipFill>
-        <p:spPr>
-          <a:xfrm>
-            <a:off x="9562795" y="2263140"/>
-            <a:ext cx="685800" cy="685800"/>
-          </a:xfrm>
-          <a:prstGeom prst="rect">
-            <a:avLst/>
-          </a:prstGeom>
-        </p:spPr>
-      </p:pic>
-      <p:sp>
-        <p:nvSpPr>
-          <p:cNvPr id="6" name="Text 3"/>
+          <p:cNvPr id="23" name="Text 17"/>
           <p:cNvSpPr txBox="1"/>
           <p:nvPr/>
         </p:nvSpPr>
         <p:spPr>
           <a:xfrm>
-            <a:off x="8396935" y="3474720"/>
-            <a:ext cx="3017520" cy="502920"/>
+            <a:off x="731520" y="3977640"/>
+            <a:ext cx="3749040" cy="914400"/>
           </a:xfrm>
           <a:prstGeom prst="rect">
             <a:avLst/>
@@ -4290,27 +5759,63 @@
               <a:buNone/>
             </a:pPr>
             <a:r>
-              <a:rPr lang="he-IL" altLang="en-US" sz="2200" b="1" dirty="0">
-                <a:solidFill>
-                  <a:schemeClr val="tx2"/>
-                </a:solidFill>
-              </a:rPr>
-              <a:t>[שם מלא]</a:t>
-            </a:r>
-            <a:endParaRPr lang="he-IL" sz="2200" dirty="0"/>
-          </a:p>
-        </p:txBody>
-      </p:sp>
-      <p:sp>
-        <p:nvSpPr>
-          <p:cNvPr id="7" name="Text 4"/>
+              <a:rPr lang="he-IL" altLang="en-US" sz="4000" b="1" dirty="0">
+                <a:solidFill>
+                  <a:schemeClr val="accent1"/>
+                </a:solidFill>
+              </a:rPr>
+              <a:t>45%</a:t>
+            </a:r>
+            <a:endParaRPr lang="he-IL" sz="4000" dirty="0"/>
+          </a:p>
+        </p:txBody>
+      </p:sp>
+      <p:sp>
+        <p:nvSpPr>
+          <p:cNvPr id="24" name="Text 18"/>
           <p:cNvSpPr txBox="1"/>
           <p:nvPr/>
         </p:nvSpPr>
         <p:spPr>
           <a:xfrm>
-            <a:off x="8396935" y="4023360"/>
-            <a:ext cx="3017520" cy="457200"/>
+            <a:off x="731520" y="4892040"/>
+            <a:ext cx="3749040" cy="731520"/>
+          </a:xfrm>
+          <a:prstGeom prst="rect">
+            <a:avLst/>
+          </a:prstGeom>
+          <a:noFill/>
+          <a:ln/>
+        </p:spPr>
+        <p:txBody>
+          <a:bodyPr wrap="square" rtlCol="0" anchor="t"/>
+          <a:lstStyle/>
+          <a:p>
+            <a:pPr rtl="1" algn="ctr" indent="0" marL="0">
+              <a:buNone/>
+            </a:pPr>
+            <a:r>
+              <a:rPr lang="he-IL" altLang="en-US" sz="1500" dirty="0">
+                <a:solidFill>
+                  <a:schemeClr val="tx1"/>
+                </a:solidFill>
+              </a:rPr>
+              <a:t>עלייה ממוצעת בפרודוקטיביות שדיווחו משתמשי Bob ב-IBM</a:t>
+            </a:r>
+            <a:endParaRPr lang="he-IL" sz="1500" dirty="0"/>
+          </a:p>
+        </p:txBody>
+      </p:sp>
+      <p:sp>
+        <p:nvSpPr>
+          <p:cNvPr id="25" name="Text 19"/>
+          <p:cNvSpPr txBox="1"/>
+          <p:nvPr/>
+        </p:nvSpPr>
+        <p:spPr>
+          <a:xfrm>
+            <a:off x="731520" y="5623560"/>
+            <a:ext cx="3749040" cy="320040"/>
           </a:xfrm>
           <a:prstGeom prst="rect">
             <a:avLst/>
@@ -4326,418 +5831,14 @@
               <a:buNone/>
             </a:pPr>
             <a:r>
-              <a:rPr lang="he-IL" altLang="en-US" sz="1500" b="1" dirty="0">
-                <a:solidFill>
-                  <a:schemeClr val="accent1"/>
-                </a:solidFill>
-              </a:rPr>
-              <a:t>[תפקיד — למשל: מובילת מוצר]</a:t>
-            </a:r>
-            <a:endParaRPr lang="he-IL" sz="1500" dirty="0"/>
-          </a:p>
-        </p:txBody>
-      </p:sp>
-      <p:sp>
-        <p:nvSpPr>
-          <p:cNvPr id="8" name="Text 5"/>
-          <p:cNvSpPr txBox="1"/>
-          <p:nvPr/>
-        </p:nvSpPr>
-        <p:spPr>
-          <a:xfrm>
-            <a:off x="8396935" y="4526280"/>
-            <a:ext cx="3017520" cy="1005840"/>
-          </a:xfrm>
-          <a:prstGeom prst="rect">
-            <a:avLst/>
-          </a:prstGeom>
-          <a:noFill/>
-          <a:ln/>
-        </p:spPr>
-        <p:txBody>
-          <a:bodyPr wrap="square" rtlCol="0" anchor="t"/>
-          <a:lstStyle/>
-          <a:p>
-            <a:pPr rtl="1" algn="ctr" indent="0" marL="0">
-              <a:buNone/>
-            </a:pPr>
-            <a:r>
-              <a:rPr lang="he-IL" altLang="en-US" sz="1500" dirty="0">
-                <a:solidFill>
-                  <a:schemeClr val="tx1"/>
-                </a:solidFill>
-              </a:rPr>
-              <a:t>[ניסיון רלוונטי]</a:t>
-            </a:r>
-            <a:endParaRPr lang="he-IL" sz="1500" dirty="0"/>
-          </a:p>
-        </p:txBody>
-      </p:sp>
-      <p:sp>
-        <p:nvSpPr>
-          <p:cNvPr id="9" name="team card 2"/>
-          <p:cNvSpPr/>
-          <p:nvPr/>
-        </p:nvSpPr>
-        <p:spPr>
-          <a:xfrm>
-            <a:off x="4364431" y="1554480"/>
-            <a:ext cx="3474720" cy="4206240"/>
-          </a:xfrm>
-          <a:prstGeom prst="roundRect">
-            <a:avLst>
-              <a:gd name="adj" fmla="val 3158"/>
-            </a:avLst>
-          </a:prstGeom>
-          <a:solidFill>
-            <a:schemeClr val="bg2"/>
-          </a:solidFill>
-          <a:ln w="12700">
-            <a:solidFill>
-              <a:schemeClr val="bg2"/>
-            </a:solidFill>
-            <a:prstDash val="solid"/>
-          </a:ln>
-        </p:spPr>
-      </p:sp>
-      <p:sp>
-        <p:nvSpPr>
-          <p:cNvPr id="10" name="חבר/ת צוות 2 circle"/>
-          <p:cNvSpPr/>
-          <p:nvPr/>
-        </p:nvSpPr>
-        <p:spPr>
-          <a:xfrm>
-            <a:off x="5415991" y="1920240"/>
-            <a:ext cx="1371600" cy="1371600"/>
-          </a:xfrm>
-          <a:prstGeom prst="ellipse">
-            <a:avLst/>
-          </a:prstGeom>
-          <a:solidFill>
-            <a:schemeClr val="tx2"/>
-          </a:solidFill>
-          <a:ln w="12700">
-            <a:solidFill>
-              <a:schemeClr val="tx2"/>
-            </a:solidFill>
-            <a:prstDash val="solid"/>
-          </a:ln>
-        </p:spPr>
-      </p:sp>
-      <p:pic>
-        <p:nvPicPr>
-          <p:cNvPr id="11" name="חבר/ת צוות 2 icon" descr="חבר/ת צוות 2">    </p:cNvPr>
-          <p:cNvPicPr>
-            <a:picLocks noChangeAspect="1"/>
-          </p:cNvPicPr>
-          <p:nvPr/>
-        </p:nvPicPr>
-        <p:blipFill>
-          <a:blip r:embed="rId2"/>
-          <a:stretch>
-            <a:fillRect/>
-          </a:stretch>
-        </p:blipFill>
-        <p:spPr>
-          <a:xfrm>
-            <a:off x="5758891" y="2263140"/>
-            <a:ext cx="685800" cy="685800"/>
-          </a:xfrm>
-          <a:prstGeom prst="rect">
-            <a:avLst/>
-          </a:prstGeom>
-        </p:spPr>
-      </p:pic>
-      <p:sp>
-        <p:nvSpPr>
-          <p:cNvPr id="12" name="Text 8"/>
-          <p:cNvSpPr txBox="1"/>
-          <p:nvPr/>
-        </p:nvSpPr>
-        <p:spPr>
-          <a:xfrm>
-            <a:off x="4593031" y="3474720"/>
-            <a:ext cx="3017520" cy="502920"/>
-          </a:xfrm>
-          <a:prstGeom prst="rect">
-            <a:avLst/>
-          </a:prstGeom>
-          <a:noFill/>
-          <a:ln/>
-        </p:spPr>
-        <p:txBody>
-          <a:bodyPr wrap="square" rtlCol="0" anchor="ctr"/>
-          <a:lstStyle/>
-          <a:p>
-            <a:pPr rtl="1" algn="ctr" indent="0" marL="0">
-              <a:buNone/>
-            </a:pPr>
-            <a:r>
-              <a:rPr lang="he-IL" altLang="en-US" sz="2200" b="1" dirty="0">
-                <a:solidFill>
-                  <a:schemeClr val="tx2"/>
-                </a:solidFill>
-              </a:rPr>
-              <a:t>[שם מלא]</a:t>
-            </a:r>
-            <a:endParaRPr lang="he-IL" sz="2200" dirty="0"/>
-          </a:p>
-        </p:txBody>
-      </p:sp>
-      <p:sp>
-        <p:nvSpPr>
-          <p:cNvPr id="13" name="Text 9"/>
-          <p:cNvSpPr txBox="1"/>
-          <p:nvPr/>
-        </p:nvSpPr>
-        <p:spPr>
-          <a:xfrm>
-            <a:off x="4593031" y="4023360"/>
-            <a:ext cx="3017520" cy="457200"/>
-          </a:xfrm>
-          <a:prstGeom prst="rect">
-            <a:avLst/>
-          </a:prstGeom>
-          <a:noFill/>
-          <a:ln/>
-        </p:spPr>
-        <p:txBody>
-          <a:bodyPr wrap="square" rtlCol="0" anchor="ctr"/>
-          <a:lstStyle/>
-          <a:p>
-            <a:pPr rtl="1" algn="ctr" indent="0" marL="0">
-              <a:buNone/>
-            </a:pPr>
-            <a:r>
-              <a:rPr lang="he-IL" altLang="en-US" sz="1500" b="1" dirty="0">
-                <a:solidFill>
-                  <a:schemeClr val="accent1"/>
-                </a:solidFill>
-              </a:rPr>
-              <a:t>[תפקיד — למשל: Data / AI]</a:t>
-            </a:r>
-            <a:endParaRPr lang="he-IL" sz="1500" dirty="0"/>
-          </a:p>
-        </p:txBody>
-      </p:sp>
-      <p:sp>
-        <p:nvSpPr>
-          <p:cNvPr id="14" name="Text 10"/>
-          <p:cNvSpPr txBox="1"/>
-          <p:nvPr/>
-        </p:nvSpPr>
-        <p:spPr>
-          <a:xfrm>
-            <a:off x="4593031" y="4526280"/>
-            <a:ext cx="3017520" cy="1005840"/>
-          </a:xfrm>
-          <a:prstGeom prst="rect">
-            <a:avLst/>
-          </a:prstGeom>
-          <a:noFill/>
-          <a:ln/>
-        </p:spPr>
-        <p:txBody>
-          <a:bodyPr wrap="square" rtlCol="0" anchor="t"/>
-          <a:lstStyle/>
-          <a:p>
-            <a:pPr rtl="1" algn="ctr" indent="0" marL="0">
-              <a:buNone/>
-            </a:pPr>
-            <a:r>
-              <a:rPr lang="he-IL" altLang="en-US" sz="1500" dirty="0">
-                <a:solidFill>
-                  <a:schemeClr val="tx1"/>
-                </a:solidFill>
-              </a:rPr>
-              <a:t>[ניסיון רלוונטי]</a:t>
-            </a:r>
-            <a:endParaRPr lang="he-IL" sz="1500" dirty="0"/>
-          </a:p>
-        </p:txBody>
-      </p:sp>
-      <p:sp>
-        <p:nvSpPr>
-          <p:cNvPr id="15" name="team card 3"/>
-          <p:cNvSpPr/>
-          <p:nvPr/>
-        </p:nvSpPr>
-        <p:spPr>
-          <a:xfrm>
-            <a:off x="560527" y="1554480"/>
-            <a:ext cx="3474720" cy="4206240"/>
-          </a:xfrm>
-          <a:prstGeom prst="roundRect">
-            <a:avLst>
-              <a:gd name="adj" fmla="val 3158"/>
-            </a:avLst>
-          </a:prstGeom>
-          <a:solidFill>
-            <a:schemeClr val="bg2"/>
-          </a:solidFill>
-          <a:ln w="12700">
-            <a:solidFill>
-              <a:schemeClr val="bg2"/>
-            </a:solidFill>
-            <a:prstDash val="solid"/>
-          </a:ln>
-        </p:spPr>
-      </p:sp>
-      <p:sp>
-        <p:nvSpPr>
-          <p:cNvPr id="16" name="חבר/ת צוות 3 circle"/>
-          <p:cNvSpPr/>
-          <p:nvPr/>
-        </p:nvSpPr>
-        <p:spPr>
-          <a:xfrm>
-            <a:off x="1612087" y="1920240"/>
-            <a:ext cx="1371600" cy="1371600"/>
-          </a:xfrm>
-          <a:prstGeom prst="ellipse">
-            <a:avLst/>
-          </a:prstGeom>
-          <a:solidFill>
-            <a:schemeClr val="tx2"/>
-          </a:solidFill>
-          <a:ln w="12700">
-            <a:solidFill>
-              <a:schemeClr val="tx2"/>
-            </a:solidFill>
-            <a:prstDash val="solid"/>
-          </a:ln>
-        </p:spPr>
-      </p:sp>
-      <p:pic>
-        <p:nvPicPr>
-          <p:cNvPr id="17" name="חבר/ת צוות 3 icon" descr="חבר/ת צוות 3">    </p:cNvPr>
-          <p:cNvPicPr>
-            <a:picLocks noChangeAspect="1"/>
-          </p:cNvPicPr>
-          <p:nvPr/>
-        </p:nvPicPr>
-        <p:blipFill>
-          <a:blip r:embed="rId3"/>
-          <a:stretch>
-            <a:fillRect/>
-          </a:stretch>
-        </p:blipFill>
-        <p:spPr>
-          <a:xfrm>
-            <a:off x="1954987" y="2263140"/>
-            <a:ext cx="685800" cy="685800"/>
-          </a:xfrm>
-          <a:prstGeom prst="rect">
-            <a:avLst/>
-          </a:prstGeom>
-        </p:spPr>
-      </p:pic>
-      <p:sp>
-        <p:nvSpPr>
-          <p:cNvPr id="18" name="Text 13"/>
-          <p:cNvSpPr txBox="1"/>
-          <p:nvPr/>
-        </p:nvSpPr>
-        <p:spPr>
-          <a:xfrm>
-            <a:off x="789127" y="3474720"/>
-            <a:ext cx="3017520" cy="502920"/>
-          </a:xfrm>
-          <a:prstGeom prst="rect">
-            <a:avLst/>
-          </a:prstGeom>
-          <a:noFill/>
-          <a:ln/>
-        </p:spPr>
-        <p:txBody>
-          <a:bodyPr wrap="square" rtlCol="0" anchor="ctr"/>
-          <a:lstStyle/>
-          <a:p>
-            <a:pPr rtl="1" algn="ctr" indent="0" marL="0">
-              <a:buNone/>
-            </a:pPr>
-            <a:r>
-              <a:rPr lang="he-IL" altLang="en-US" sz="2200" b="1" dirty="0">
-                <a:solidFill>
-                  <a:schemeClr val="tx2"/>
-                </a:solidFill>
-              </a:rPr>
-              <a:t>[שם מלא]</a:t>
-            </a:r>
-            <a:endParaRPr lang="he-IL" sz="2200" dirty="0"/>
-          </a:p>
-        </p:txBody>
-      </p:sp>
-      <p:sp>
-        <p:nvSpPr>
-          <p:cNvPr id="19" name="Text 14"/>
-          <p:cNvSpPr txBox="1"/>
-          <p:nvPr/>
-        </p:nvSpPr>
-        <p:spPr>
-          <a:xfrm>
-            <a:off x="789127" y="4023360"/>
-            <a:ext cx="3017520" cy="457200"/>
-          </a:xfrm>
-          <a:prstGeom prst="rect">
-            <a:avLst/>
-          </a:prstGeom>
-          <a:noFill/>
-          <a:ln/>
-        </p:spPr>
-        <p:txBody>
-          <a:bodyPr wrap="square" rtlCol="0" anchor="ctr"/>
-          <a:lstStyle/>
-          <a:p>
-            <a:pPr rtl="1" algn="ctr" indent="0" marL="0">
-              <a:buNone/>
-            </a:pPr>
-            <a:r>
-              <a:rPr lang="he-IL" altLang="en-US" sz="1500" b="1" dirty="0">
-                <a:solidFill>
-                  <a:schemeClr val="accent1"/>
-                </a:solidFill>
-              </a:rPr>
-              <a:t>[תפקיד — למשל: פיתוח]</a:t>
-            </a:r>
-            <a:endParaRPr lang="he-IL" sz="1500" dirty="0"/>
-          </a:p>
-        </p:txBody>
-      </p:sp>
-      <p:sp>
-        <p:nvSpPr>
-          <p:cNvPr id="20" name="Text 15"/>
-          <p:cNvSpPr txBox="1"/>
-          <p:nvPr/>
-        </p:nvSpPr>
-        <p:spPr>
-          <a:xfrm>
-            <a:off x="789127" y="4526280"/>
-            <a:ext cx="3017520" cy="1005840"/>
-          </a:xfrm>
-          <a:prstGeom prst="rect">
-            <a:avLst/>
-          </a:prstGeom>
-          <a:noFill/>
-          <a:ln/>
-        </p:spPr>
-        <p:txBody>
-          <a:bodyPr wrap="square" rtlCol="0" anchor="t"/>
-          <a:lstStyle/>
-          <a:p>
-            <a:pPr rtl="1" algn="ctr" indent="0" marL="0">
-              <a:buNone/>
-            </a:pPr>
-            <a:r>
-              <a:rPr lang="he-IL" altLang="en-US" sz="1500" dirty="0">
-                <a:solidFill>
-                  <a:schemeClr val="tx1"/>
-                </a:solidFill>
-              </a:rPr>
-              <a:t>[ניסיון רלוונטי]</a:t>
-            </a:r>
-            <a:endParaRPr lang="he-IL" sz="1500" dirty="0"/>
+              <a:rPr lang="he-IL" altLang="en-US" sz="1100" i="1" dirty="0">
+                <a:solidFill>
+                  <a:schemeClr val="accent4"/>
+                </a:solidFill>
+              </a:rPr>
+              <a:t>מקור: IBM, אפריל 2026 (דיווח עצמי)</a:t>
+            </a:r>
+            <a:endParaRPr lang="he-IL" sz="1100" dirty="0"/>
           </a:p>
         </p:txBody>
       </p:sp>
@@ -4814,6 +5915,1437 @@
       <p:sp>
         <p:nvSpPr>
           <p:cNvPr id="2" name="Text 0"/>
+          <p:cNvSpPr/>
+          <p:nvPr>
+            <p:ph idx="100" type="title" hasCustomPrompt="1"/>
+          </p:nvPr>
+        </p:nvSpPr>
+        <p:spPr>
+          <a:xfrm>
+            <a:off x="548640" y="320040"/>
+            <a:ext cx="11091672" cy="868680"/>
+          </a:xfrm>
+          <a:prstGeom prst="rect">
+            <a:avLst/>
+          </a:prstGeom>
+          <a:noFill/>
+          <a:ln/>
+        </p:spPr>
+        <p:txBody>
+          <a:bodyPr wrap="square" rtlCol="0" anchor="ctr"/>
+          <a:lstStyle/>
+          <a:p>
+            <a:pPr rtl="1" algn="r" indent="0" marL="0">
+              <a:buNone/>
+            </a:pPr>
+            <a:r>
+              <a:rPr lang="he-IL" altLang="en-US" sz="3200" b="1" dirty="0">
+                <a:solidFill>
+                  <a:schemeClr val="tx2"/>
+                </a:solidFill>
+              </a:rPr>
+              <a:t>מפת דרכים ל-12 חודשים</a:t>
+            </a:r>
+            <a:endParaRPr lang="he-IL" sz="3200" dirty="0"/>
+          </a:p>
+        </p:txBody>
+      </p:sp>
+      <p:sp>
+        <p:nvSpPr>
+          <p:cNvPr id="3" name="timeline line"/>
+          <p:cNvSpPr/>
+          <p:nvPr/>
+        </p:nvSpPr>
+        <p:spPr>
+          <a:xfrm>
+            <a:off x="1097280" y="2743200"/>
+            <a:ext cx="9966960" cy="0"/>
+          </a:xfrm>
+          <a:prstGeom prst="line">
+            <a:avLst/>
+          </a:prstGeom>
+          <a:noFill/>
+          <a:ln w="38100">
+            <a:solidFill>
+              <a:schemeClr val="accent3"/>
+            </a:solidFill>
+            <a:prstDash val="solid"/>
+          </a:ln>
+        </p:spPr>
+      </p:sp>
+      <p:sp>
+        <p:nvSpPr>
+          <p:cNvPr id="4" name="milestone 1"/>
+          <p:cNvSpPr/>
+          <p:nvPr/>
+        </p:nvSpPr>
+        <p:spPr>
+          <a:xfrm>
+            <a:off x="10111435" y="2468880"/>
+            <a:ext cx="548640" cy="548640"/>
+          </a:xfrm>
+          <a:prstGeom prst="ellipse">
+            <a:avLst/>
+          </a:prstGeom>
+          <a:solidFill>
+            <a:schemeClr val="accent2"/>
+          </a:solidFill>
+          <a:ln w="25400">
+            <a:solidFill>
+              <a:srgbClr val="FFFFFF"/>
+            </a:solidFill>
+            <a:prstDash val="solid"/>
+          </a:ln>
+        </p:spPr>
+      </p:sp>
+      <p:sp>
+        <p:nvSpPr>
+          <p:cNvPr id="5" name="Text 3"/>
+          <p:cNvSpPr txBox="1"/>
+          <p:nvPr/>
+        </p:nvSpPr>
+        <p:spPr>
+          <a:xfrm>
+            <a:off x="9128455" y="1874520"/>
+            <a:ext cx="2514600" cy="411480"/>
+          </a:xfrm>
+          <a:prstGeom prst="rect">
+            <a:avLst/>
+          </a:prstGeom>
+          <a:noFill/>
+          <a:ln/>
+        </p:spPr>
+        <p:txBody>
+          <a:bodyPr wrap="square" rtlCol="0" anchor="ctr"/>
+          <a:lstStyle/>
+          <a:p>
+            <a:pPr rtl="1" algn="ctr" indent="0" marL="0">
+              <a:buNone/>
+            </a:pPr>
+            <a:r>
+              <a:rPr lang="he-IL" altLang="en-US" sz="1500" b="1" dirty="0">
+                <a:solidFill>
+                  <a:schemeClr val="accent4"/>
+                </a:solidFill>
+              </a:rPr>
+              <a:t>רבעון 1</a:t>
+            </a:r>
+            <a:endParaRPr lang="he-IL" sz="1500" dirty="0"/>
+          </a:p>
+        </p:txBody>
+      </p:sp>
+      <p:sp>
+        <p:nvSpPr>
+          <p:cNvPr id="6" name="milestone card 1"/>
+          <p:cNvSpPr/>
+          <p:nvPr/>
+        </p:nvSpPr>
+        <p:spPr>
+          <a:xfrm>
+            <a:off x="9128455" y="3291840"/>
+            <a:ext cx="2514600" cy="2377440"/>
+          </a:xfrm>
+          <a:prstGeom prst="roundRect">
+            <a:avLst>
+              <a:gd name="adj" fmla="val 4615"/>
+            </a:avLst>
+          </a:prstGeom>
+          <a:solidFill>
+            <a:schemeClr val="bg2"/>
+          </a:solidFill>
+          <a:ln w="12700">
+            <a:solidFill>
+              <a:schemeClr val="bg2"/>
+            </a:solidFill>
+            <a:prstDash val="solid"/>
+          </a:ln>
+        </p:spPr>
+      </p:sp>
+      <p:sp>
+        <p:nvSpPr>
+          <p:cNvPr id="7" name="Text 5"/>
+          <p:cNvSpPr txBox="1"/>
+          <p:nvPr/>
+        </p:nvSpPr>
+        <p:spPr>
+          <a:xfrm>
+            <a:off x="9311335" y="3429000"/>
+            <a:ext cx="2148840" cy="502920"/>
+          </a:xfrm>
+          <a:prstGeom prst="rect">
+            <a:avLst/>
+          </a:prstGeom>
+          <a:noFill/>
+          <a:ln/>
+        </p:spPr>
+        <p:txBody>
+          <a:bodyPr wrap="square" rtlCol="0" anchor="ctr"/>
+          <a:lstStyle/>
+          <a:p>
+            <a:pPr rtl="1" algn="ctr" indent="0" marL="0">
+              <a:buNone/>
+            </a:pPr>
+            <a:r>
+              <a:rPr lang="he-IL" altLang="en-US" sz="2200" b="1" dirty="0">
+                <a:solidFill>
+                  <a:schemeClr val="tx2"/>
+                </a:solidFill>
+              </a:rPr>
+              <a:t>MVP</a:t>
+            </a:r>
+            <a:endParaRPr lang="he-IL" sz="2200" dirty="0"/>
+          </a:p>
+        </p:txBody>
+      </p:sp>
+      <p:sp>
+        <p:nvSpPr>
+          <p:cNvPr id="8" name="Text 6"/>
+          <p:cNvSpPr txBox="1"/>
+          <p:nvPr/>
+        </p:nvSpPr>
+        <p:spPr>
+          <a:xfrm>
+            <a:off x="9311335" y="3977640"/>
+            <a:ext cx="2148840" cy="1554480"/>
+          </a:xfrm>
+          <a:prstGeom prst="rect">
+            <a:avLst/>
+          </a:prstGeom>
+          <a:noFill/>
+          <a:ln/>
+        </p:spPr>
+        <p:txBody>
+          <a:bodyPr wrap="square" rtlCol="0" anchor="t"/>
+          <a:lstStyle/>
+          <a:p>
+            <a:pPr rtl="1" algn="ctr" indent="0" marL="0">
+              <a:buNone/>
+            </a:pPr>
+            <a:r>
+              <a:rPr lang="he-IL" altLang="en-US" sz="1500" dirty="0">
+                <a:solidFill>
+                  <a:schemeClr val="tx1"/>
+                </a:solidFill>
+              </a:rPr>
+              <a:t>נבנה עם IBM Bob: קטלוג נתונים + סוכני כלים וחשמל</a:t>
+            </a:r>
+            <a:endParaRPr lang="he-IL" sz="1500" dirty="0"/>
+          </a:p>
+        </p:txBody>
+      </p:sp>
+      <p:sp>
+        <p:nvSpPr>
+          <p:cNvPr id="9" name="milestone 2"/>
+          <p:cNvSpPr/>
+          <p:nvPr/>
+        </p:nvSpPr>
+        <p:spPr>
+          <a:xfrm>
+            <a:off x="7249363" y="2468880"/>
+            <a:ext cx="548640" cy="548640"/>
+          </a:xfrm>
+          <a:prstGeom prst="ellipse">
+            <a:avLst/>
+          </a:prstGeom>
+          <a:solidFill>
+            <a:schemeClr val="accent1"/>
+          </a:solidFill>
+          <a:ln w="25400">
+            <a:solidFill>
+              <a:srgbClr val="FFFFFF"/>
+            </a:solidFill>
+            <a:prstDash val="solid"/>
+          </a:ln>
+        </p:spPr>
+      </p:sp>
+      <p:sp>
+        <p:nvSpPr>
+          <p:cNvPr id="10" name="Text 8"/>
+          <p:cNvSpPr txBox="1"/>
+          <p:nvPr/>
+        </p:nvSpPr>
+        <p:spPr>
+          <a:xfrm>
+            <a:off x="6266383" y="1874520"/>
+            <a:ext cx="2514600" cy="411480"/>
+          </a:xfrm>
+          <a:prstGeom prst="rect">
+            <a:avLst/>
+          </a:prstGeom>
+          <a:noFill/>
+          <a:ln/>
+        </p:spPr>
+        <p:txBody>
+          <a:bodyPr wrap="square" rtlCol="0" anchor="ctr"/>
+          <a:lstStyle/>
+          <a:p>
+            <a:pPr rtl="1" algn="ctr" indent="0" marL="0">
+              <a:buNone/>
+            </a:pPr>
+            <a:r>
+              <a:rPr lang="he-IL" altLang="en-US" sz="1500" b="1" dirty="0">
+                <a:solidFill>
+                  <a:schemeClr val="accent4"/>
+                </a:solidFill>
+              </a:rPr>
+              <a:t>רבעון 2</a:t>
+            </a:r>
+            <a:endParaRPr lang="he-IL" sz="1500" dirty="0"/>
+          </a:p>
+        </p:txBody>
+      </p:sp>
+      <p:sp>
+        <p:nvSpPr>
+          <p:cNvPr id="11" name="milestone card 2"/>
+          <p:cNvSpPr/>
+          <p:nvPr/>
+        </p:nvSpPr>
+        <p:spPr>
+          <a:xfrm>
+            <a:off x="6266383" y="3291840"/>
+            <a:ext cx="2514600" cy="2377440"/>
+          </a:xfrm>
+          <a:prstGeom prst="roundRect">
+            <a:avLst>
+              <a:gd name="adj" fmla="val 4615"/>
+            </a:avLst>
+          </a:prstGeom>
+          <a:solidFill>
+            <a:schemeClr val="bg2"/>
+          </a:solidFill>
+          <a:ln w="12700">
+            <a:solidFill>
+              <a:schemeClr val="bg2"/>
+            </a:solidFill>
+            <a:prstDash val="solid"/>
+          </a:ln>
+        </p:spPr>
+      </p:sp>
+      <p:sp>
+        <p:nvSpPr>
+          <p:cNvPr id="12" name="Text 10"/>
+          <p:cNvSpPr txBox="1"/>
+          <p:nvPr/>
+        </p:nvSpPr>
+        <p:spPr>
+          <a:xfrm>
+            <a:off x="6449263" y="3429000"/>
+            <a:ext cx="2148840" cy="502920"/>
+          </a:xfrm>
+          <a:prstGeom prst="rect">
+            <a:avLst/>
+          </a:prstGeom>
+          <a:noFill/>
+          <a:ln/>
+        </p:spPr>
+        <p:txBody>
+          <a:bodyPr wrap="square" rtlCol="0" anchor="ctr"/>
+          <a:lstStyle/>
+          <a:p>
+            <a:pPr rtl="1" algn="ctr" indent="0" marL="0">
+              <a:buNone/>
+            </a:pPr>
+            <a:r>
+              <a:rPr lang="he-IL" altLang="en-US" sz="2200" b="1" dirty="0">
+                <a:solidFill>
+                  <a:schemeClr val="tx2"/>
+                </a:solidFill>
+              </a:rPr>
+              <a:t>פיילוט</a:t>
+            </a:r>
+            <a:endParaRPr lang="he-IL" sz="2200" dirty="0"/>
+          </a:p>
+        </p:txBody>
+      </p:sp>
+      <p:sp>
+        <p:nvSpPr>
+          <p:cNvPr id="13" name="Text 11"/>
+          <p:cNvSpPr txBox="1"/>
+          <p:nvPr/>
+        </p:nvSpPr>
+        <p:spPr>
+          <a:xfrm>
+            <a:off x="6449263" y="3977640"/>
+            <a:ext cx="2148840" cy="1554480"/>
+          </a:xfrm>
+          <a:prstGeom prst="rect">
+            <a:avLst/>
+          </a:prstGeom>
+          <a:noFill/>
+          <a:ln/>
+        </p:spPr>
+        <p:txBody>
+          <a:bodyPr wrap="square" rtlCol="0" anchor="t"/>
+          <a:lstStyle/>
+          <a:p>
+            <a:pPr rtl="1" algn="ctr" indent="0" marL="0">
+              <a:buNone/>
+            </a:pPr>
+            <a:r>
+              <a:rPr lang="he-IL" altLang="en-US" sz="1500" dirty="0">
+                <a:solidFill>
+                  <a:schemeClr val="tx1"/>
+                </a:solidFill>
+              </a:rPr>
+              <a:t>2 ארגונים, מדידת חיסכון מאומת מול קו בסיס</a:t>
+            </a:r>
+            <a:endParaRPr lang="he-IL" sz="1500" dirty="0"/>
+          </a:p>
+        </p:txBody>
+      </p:sp>
+      <p:sp>
+        <p:nvSpPr>
+          <p:cNvPr id="14" name="milestone 3"/>
+          <p:cNvSpPr/>
+          <p:nvPr/>
+        </p:nvSpPr>
+        <p:spPr>
+          <a:xfrm>
+            <a:off x="4387291" y="2468880"/>
+            <a:ext cx="548640" cy="548640"/>
+          </a:xfrm>
+          <a:prstGeom prst="ellipse">
+            <a:avLst/>
+          </a:prstGeom>
+          <a:solidFill>
+            <a:schemeClr val="accent1"/>
+          </a:solidFill>
+          <a:ln w="25400">
+            <a:solidFill>
+              <a:srgbClr val="FFFFFF"/>
+            </a:solidFill>
+            <a:prstDash val="solid"/>
+          </a:ln>
+        </p:spPr>
+      </p:sp>
+      <p:sp>
+        <p:nvSpPr>
+          <p:cNvPr id="15" name="Text 13"/>
+          <p:cNvSpPr txBox="1"/>
+          <p:nvPr/>
+        </p:nvSpPr>
+        <p:spPr>
+          <a:xfrm>
+            <a:off x="3404311" y="1874520"/>
+            <a:ext cx="2514600" cy="411480"/>
+          </a:xfrm>
+          <a:prstGeom prst="rect">
+            <a:avLst/>
+          </a:prstGeom>
+          <a:noFill/>
+          <a:ln/>
+        </p:spPr>
+        <p:txBody>
+          <a:bodyPr wrap="square" rtlCol="0" anchor="ctr"/>
+          <a:lstStyle/>
+          <a:p>
+            <a:pPr rtl="1" algn="ctr" indent="0" marL="0">
+              <a:buNone/>
+            </a:pPr>
+            <a:r>
+              <a:rPr lang="he-IL" altLang="en-US" sz="1500" b="1" dirty="0">
+                <a:solidFill>
+                  <a:schemeClr val="accent4"/>
+                </a:solidFill>
+              </a:rPr>
+              <a:t>רבעון 3</a:t>
+            </a:r>
+            <a:endParaRPr lang="he-IL" sz="1500" dirty="0"/>
+          </a:p>
+        </p:txBody>
+      </p:sp>
+      <p:sp>
+        <p:nvSpPr>
+          <p:cNvPr id="16" name="milestone card 3"/>
+          <p:cNvSpPr/>
+          <p:nvPr/>
+        </p:nvSpPr>
+        <p:spPr>
+          <a:xfrm>
+            <a:off x="3404311" y="3291840"/>
+            <a:ext cx="2514600" cy="2377440"/>
+          </a:xfrm>
+          <a:prstGeom prst="roundRect">
+            <a:avLst>
+              <a:gd name="adj" fmla="val 4615"/>
+            </a:avLst>
+          </a:prstGeom>
+          <a:solidFill>
+            <a:schemeClr val="bg2"/>
+          </a:solidFill>
+          <a:ln w="12700">
+            <a:solidFill>
+              <a:schemeClr val="bg2"/>
+            </a:solidFill>
+            <a:prstDash val="solid"/>
+          </a:ln>
+        </p:spPr>
+      </p:sp>
+      <p:sp>
+        <p:nvSpPr>
+          <p:cNvPr id="17" name="Text 15"/>
+          <p:cNvSpPr txBox="1"/>
+          <p:nvPr/>
+        </p:nvSpPr>
+        <p:spPr>
+          <a:xfrm>
+            <a:off x="3587191" y="3429000"/>
+            <a:ext cx="2148840" cy="502920"/>
+          </a:xfrm>
+          <a:prstGeom prst="rect">
+            <a:avLst/>
+          </a:prstGeom>
+          <a:noFill/>
+          <a:ln/>
+        </p:spPr>
+        <p:txBody>
+          <a:bodyPr wrap="square" rtlCol="0" anchor="ctr"/>
+          <a:lstStyle/>
+          <a:p>
+            <a:pPr rtl="1" algn="ctr" indent="0" marL="0">
+              <a:buNone/>
+            </a:pPr>
+            <a:r>
+              <a:rPr lang="he-IL" altLang="en-US" sz="2200" b="1" dirty="0">
+                <a:solidFill>
+                  <a:schemeClr val="tx2"/>
+                </a:solidFill>
+              </a:rPr>
+              <a:t>מנוע אנשים</a:t>
+            </a:r>
+            <a:endParaRPr lang="he-IL" sz="2200" dirty="0"/>
+          </a:p>
+        </p:txBody>
+      </p:sp>
+      <p:sp>
+        <p:nvSpPr>
+          <p:cNvPr id="18" name="Text 16"/>
+          <p:cNvSpPr txBox="1"/>
+          <p:nvPr/>
+        </p:nvSpPr>
+        <p:spPr>
+          <a:xfrm>
+            <a:off x="3587191" y="3977640"/>
+            <a:ext cx="2148840" cy="1554480"/>
+          </a:xfrm>
+          <a:prstGeom prst="rect">
+            <a:avLst/>
+          </a:prstGeom>
+          <a:noFill/>
+          <a:ln/>
+        </p:spPr>
+        <p:txBody>
+          <a:bodyPr wrap="square" rtlCol="0" anchor="t"/>
+          <a:lstStyle/>
+          <a:p>
+            <a:pPr rtl="1" algn="ctr" indent="0" marL="0">
+              <a:buNone/>
+            </a:pPr>
+            <a:r>
+              <a:rPr lang="he-IL" altLang="en-US" sz="1500" dirty="0">
+                <a:solidFill>
+                  <a:schemeClr val="tx1"/>
+                </a:solidFill>
+              </a:rPr>
+              <a:t>הוספת ניתוח כפילויות משימות עם watsonx.governance</a:t>
+            </a:r>
+            <a:endParaRPr lang="he-IL" sz="1500" dirty="0"/>
+          </a:p>
+        </p:txBody>
+      </p:sp>
+      <p:sp>
+        <p:nvSpPr>
+          <p:cNvPr id="19" name="milestone 4"/>
+          <p:cNvSpPr/>
+          <p:nvPr/>
+        </p:nvSpPr>
+        <p:spPr>
+          <a:xfrm>
+            <a:off x="1525219" y="2468880"/>
+            <a:ext cx="548640" cy="548640"/>
+          </a:xfrm>
+          <a:prstGeom prst="ellipse">
+            <a:avLst/>
+          </a:prstGeom>
+          <a:solidFill>
+            <a:schemeClr val="accent1"/>
+          </a:solidFill>
+          <a:ln w="25400">
+            <a:solidFill>
+              <a:srgbClr val="FFFFFF"/>
+            </a:solidFill>
+            <a:prstDash val="solid"/>
+          </a:ln>
+        </p:spPr>
+      </p:sp>
+      <p:sp>
+        <p:nvSpPr>
+          <p:cNvPr id="20" name="Text 18"/>
+          <p:cNvSpPr txBox="1"/>
+          <p:nvPr/>
+        </p:nvSpPr>
+        <p:spPr>
+          <a:xfrm>
+            <a:off x="542239" y="1874520"/>
+            <a:ext cx="2514600" cy="411480"/>
+          </a:xfrm>
+          <a:prstGeom prst="rect">
+            <a:avLst/>
+          </a:prstGeom>
+          <a:noFill/>
+          <a:ln/>
+        </p:spPr>
+        <p:txBody>
+          <a:bodyPr wrap="square" rtlCol="0" anchor="ctr"/>
+          <a:lstStyle/>
+          <a:p>
+            <a:pPr rtl="1" algn="ctr" indent="0" marL="0">
+              <a:buNone/>
+            </a:pPr>
+            <a:r>
+              <a:rPr lang="he-IL" altLang="en-US" sz="1500" b="1" dirty="0">
+                <a:solidFill>
+                  <a:schemeClr val="accent4"/>
+                </a:solidFill>
+              </a:rPr>
+              <a:t>רבעון 4</a:t>
+            </a:r>
+            <a:endParaRPr lang="he-IL" sz="1500" dirty="0"/>
+          </a:p>
+        </p:txBody>
+      </p:sp>
+      <p:sp>
+        <p:nvSpPr>
+          <p:cNvPr id="21" name="milestone card 4"/>
+          <p:cNvSpPr/>
+          <p:nvPr/>
+        </p:nvSpPr>
+        <p:spPr>
+          <a:xfrm>
+            <a:off x="542239" y="3291840"/>
+            <a:ext cx="2514600" cy="2377440"/>
+          </a:xfrm>
+          <a:prstGeom prst="roundRect">
+            <a:avLst>
+              <a:gd name="adj" fmla="val 4615"/>
+            </a:avLst>
+          </a:prstGeom>
+          <a:solidFill>
+            <a:schemeClr val="bg2"/>
+          </a:solidFill>
+          <a:ln w="12700">
+            <a:solidFill>
+              <a:schemeClr val="bg2"/>
+            </a:solidFill>
+            <a:prstDash val="solid"/>
+          </a:ln>
+        </p:spPr>
+      </p:sp>
+      <p:sp>
+        <p:nvSpPr>
+          <p:cNvPr id="22" name="Text 20"/>
+          <p:cNvSpPr txBox="1"/>
+          <p:nvPr/>
+        </p:nvSpPr>
+        <p:spPr>
+          <a:xfrm>
+            <a:off x="725119" y="3429000"/>
+            <a:ext cx="2148840" cy="502920"/>
+          </a:xfrm>
+          <a:prstGeom prst="rect">
+            <a:avLst/>
+          </a:prstGeom>
+          <a:noFill/>
+          <a:ln/>
+        </p:spPr>
+        <p:txBody>
+          <a:bodyPr wrap="square" rtlCol="0" anchor="ctr"/>
+          <a:lstStyle/>
+          <a:p>
+            <a:pPr rtl="1" algn="ctr" indent="0" marL="0">
+              <a:buNone/>
+            </a:pPr>
+            <a:r>
+              <a:rPr lang="he-IL" altLang="en-US" sz="2200" b="1" dirty="0">
+                <a:solidFill>
+                  <a:schemeClr val="tx2"/>
+                </a:solidFill>
+              </a:rPr>
+              <a:t>השקה</a:t>
+            </a:r>
+            <a:endParaRPr lang="he-IL" sz="2200" dirty="0"/>
+          </a:p>
+        </p:txBody>
+      </p:sp>
+      <p:sp>
+        <p:nvSpPr>
+          <p:cNvPr id="23" name="Text 21"/>
+          <p:cNvSpPr txBox="1"/>
+          <p:nvPr/>
+        </p:nvSpPr>
+        <p:spPr>
+          <a:xfrm>
+            <a:off x="725119" y="3977640"/>
+            <a:ext cx="2148840" cy="1554480"/>
+          </a:xfrm>
+          <a:prstGeom prst="rect">
+            <a:avLst/>
+          </a:prstGeom>
+          <a:noFill/>
+          <a:ln/>
+        </p:spPr>
+        <p:txBody>
+          <a:bodyPr wrap="square" rtlCol="0" anchor="t"/>
+          <a:lstStyle/>
+          <a:p>
+            <a:pPr rtl="1" algn="ctr" indent="0" marL="0">
+              <a:buNone/>
+            </a:pPr>
+            <a:r>
+              <a:rPr lang="he-IL" altLang="en-US" sz="1500" dirty="0">
+                <a:solidFill>
+                  <a:schemeClr val="tx1"/>
+                </a:solidFill>
+              </a:rPr>
+              <a:t>הפצה דרך שותפי IBM ו-10 לקוחות משלמים</a:t>
+            </a:r>
+            <a:endParaRPr lang="he-IL" sz="1500" dirty="0"/>
+          </a:p>
+        </p:txBody>
+      </p:sp>
+      <p:sp>
+        <p:nvSpPr>
+          <p:cNvPr id="25" name="Slide Number Placeholder 0"/>
+          <p:cNvSpPr>
+            <a:spLocks noGrp="1"/>
+          </p:cNvSpPr>
+          <p:nvPr>
+            <p:ph type="sldNum" sz="quarter" idx="4294967295"/>
+          </p:nvPr>
+        </p:nvSpPr>
+        <p:spPr>
+          <a:xfrm>
+            <a:off x="548640" y="6400800"/>
+            <a:ext cx="548640" cy="274320"/>
+          </a:xfrm>
+          <a:prstGeom prst="rect">
+            <a:avLst/>
+          </a:prstGeom>
+          <a:extLst>
+            <a:ext uri="{C572A759-6A51-4108-AA02-DFA0A04FC94B}">
+              <ma14:wrappingTextBoxFlag xmlns:ma14="http://schemas.microsoft.com/office/mac/drawingml/2011/main" val="0"/>
+            </a:ext>
+          </a:extLst>
+        </p:spPr>
+        <p:txBody>
+          <a:bodyPr/>
+          <a:lstStyle>
+            <a:lvl1pPr>
+              <a:defRPr sz="1000">
+                <a:solidFill>
+                  <a:schemeClr val="accent4"/>
+                </a:solidFill>
+              </a:defRPr>
+            </a:lvl1pPr>
+          </a:lstStyle>
+          <a:p>
+            <a:pPr algn="l"/>
+            <a:fld id="{F7021451-1387-4CA6-816F-3879F97B5CBC}" type="slidenum">
+              <a:rPr b="0" lang="en-US"/>
+              <a:t>13</a:t>
+            </a:fld>
+            <a:endParaRPr lang="en-US"/>
+          </a:p>
+        </p:txBody>
+      </p:sp>
+    </p:spTree>
+  </p:cSld>
+  <p:clrMapOvr>
+    <a:masterClrMapping/>
+  </p:clrMapOvr>
+</p:sld>
+</file>
+
+<file path=ppt/slides/slide14.xml><?xml version="1.0" encoding="utf-8"?>
+<p:sld xmlns:a="http://schemas.openxmlformats.org/drawingml/2006/main" xmlns:r="http://schemas.openxmlformats.org/officeDocument/2006/relationships" xmlns:p="http://schemas.openxmlformats.org/presentationml/2006/main">
+  <p:cSld name="Slide 14">
+    <p:spTree>
+      <p:nvGrpSpPr>
+        <p:cNvPr id="1" name=""/>
+        <p:cNvGrpSpPr/>
+        <p:nvPr/>
+      </p:nvGrpSpPr>
+      <p:grpSpPr>
+        <a:xfrm>
+          <a:off x="0" y="0"/>
+          <a:ext cx="0" cy="0"/>
+          <a:chOff x="0" y="0"/>
+          <a:chExt cx="0" cy="0"/>
+        </a:xfrm>
+      </p:grpSpPr>
+      <p:sp>
+        <p:nvSpPr>
+          <p:cNvPr id="2" name="Text 0"/>
+          <p:cNvSpPr/>
+          <p:nvPr>
+            <p:ph idx="100" type="title" hasCustomPrompt="1"/>
+          </p:nvPr>
+        </p:nvSpPr>
+        <p:spPr>
+          <a:xfrm>
+            <a:off x="548640" y="320040"/>
+            <a:ext cx="11091672" cy="868680"/>
+          </a:xfrm>
+          <a:prstGeom prst="rect">
+            <a:avLst/>
+          </a:prstGeom>
+          <a:noFill/>
+          <a:ln/>
+        </p:spPr>
+        <p:txBody>
+          <a:bodyPr wrap="square" rtlCol="0" anchor="ctr"/>
+          <a:lstStyle/>
+          <a:p>
+            <a:pPr rtl="1" algn="r" indent="0" marL="0">
+              <a:buNone/>
+            </a:pPr>
+            <a:r>
+              <a:rPr lang="he-IL" altLang="en-US" sz="3200" b="1" dirty="0">
+                <a:solidFill>
+                  <a:schemeClr val="tx2"/>
+                </a:solidFill>
+              </a:rPr>
+              <a:t>הצוות</a:t>
+            </a:r>
+            <a:endParaRPr lang="he-IL" sz="3200" dirty="0"/>
+          </a:p>
+        </p:txBody>
+      </p:sp>
+      <p:sp>
+        <p:nvSpPr>
+          <p:cNvPr id="3" name="team card 1"/>
+          <p:cNvSpPr/>
+          <p:nvPr/>
+        </p:nvSpPr>
+        <p:spPr>
+          <a:xfrm>
+            <a:off x="8168335" y="1554480"/>
+            <a:ext cx="3474720" cy="4206240"/>
+          </a:xfrm>
+          <a:prstGeom prst="roundRect">
+            <a:avLst>
+              <a:gd name="adj" fmla="val 3158"/>
+            </a:avLst>
+          </a:prstGeom>
+          <a:solidFill>
+            <a:schemeClr val="bg2"/>
+          </a:solidFill>
+          <a:ln w="12700">
+            <a:solidFill>
+              <a:schemeClr val="bg2"/>
+            </a:solidFill>
+            <a:prstDash val="solid"/>
+          </a:ln>
+        </p:spPr>
+      </p:sp>
+      <p:sp>
+        <p:nvSpPr>
+          <p:cNvPr id="4" name="חבר/ת צוות 1 circle"/>
+          <p:cNvSpPr/>
+          <p:nvPr/>
+        </p:nvSpPr>
+        <p:spPr>
+          <a:xfrm>
+            <a:off x="9219895" y="1920240"/>
+            <a:ext cx="1371600" cy="1371600"/>
+          </a:xfrm>
+          <a:prstGeom prst="ellipse">
+            <a:avLst/>
+          </a:prstGeom>
+          <a:solidFill>
+            <a:schemeClr val="tx2"/>
+          </a:solidFill>
+          <a:ln w="12700">
+            <a:solidFill>
+              <a:schemeClr val="tx2"/>
+            </a:solidFill>
+            <a:prstDash val="solid"/>
+          </a:ln>
+        </p:spPr>
+      </p:sp>
+      <p:pic>
+        <p:nvPicPr>
+          <p:cNvPr id="5" name="חבר/ת צוות 1 icon" descr="חבר/ת צוות 1">    </p:cNvPr>
+          <p:cNvPicPr>
+            <a:picLocks noChangeAspect="1"/>
+          </p:cNvPicPr>
+          <p:nvPr/>
+        </p:nvPicPr>
+        <p:blipFill>
+          <a:blip r:embed="rId1"/>
+          <a:stretch>
+            <a:fillRect/>
+          </a:stretch>
+        </p:blipFill>
+        <p:spPr>
+          <a:xfrm>
+            <a:off x="9562795" y="2263140"/>
+            <a:ext cx="685800" cy="685800"/>
+          </a:xfrm>
+          <a:prstGeom prst="rect">
+            <a:avLst/>
+          </a:prstGeom>
+        </p:spPr>
+      </p:pic>
+      <p:sp>
+        <p:nvSpPr>
+          <p:cNvPr id="6" name="Text 3"/>
+          <p:cNvSpPr txBox="1"/>
+          <p:nvPr/>
+        </p:nvSpPr>
+        <p:spPr>
+          <a:xfrm>
+            <a:off x="8396935" y="3474720"/>
+            <a:ext cx="3017520" cy="502920"/>
+          </a:xfrm>
+          <a:prstGeom prst="rect">
+            <a:avLst/>
+          </a:prstGeom>
+          <a:noFill/>
+          <a:ln/>
+        </p:spPr>
+        <p:txBody>
+          <a:bodyPr wrap="square" rtlCol="0" anchor="ctr"/>
+          <a:lstStyle/>
+          <a:p>
+            <a:pPr rtl="1" algn="ctr" indent="0" marL="0">
+              <a:buNone/>
+            </a:pPr>
+            <a:r>
+              <a:rPr lang="he-IL" altLang="en-US" sz="2200" b="1" dirty="0">
+                <a:solidFill>
+                  <a:schemeClr val="tx2"/>
+                </a:solidFill>
+              </a:rPr>
+              <a:t>[שם מלא]</a:t>
+            </a:r>
+            <a:endParaRPr lang="he-IL" sz="2200" dirty="0"/>
+          </a:p>
+        </p:txBody>
+      </p:sp>
+      <p:sp>
+        <p:nvSpPr>
+          <p:cNvPr id="7" name="Text 4"/>
+          <p:cNvSpPr txBox="1"/>
+          <p:nvPr/>
+        </p:nvSpPr>
+        <p:spPr>
+          <a:xfrm>
+            <a:off x="8396935" y="4023360"/>
+            <a:ext cx="3017520" cy="457200"/>
+          </a:xfrm>
+          <a:prstGeom prst="rect">
+            <a:avLst/>
+          </a:prstGeom>
+          <a:noFill/>
+          <a:ln/>
+        </p:spPr>
+        <p:txBody>
+          <a:bodyPr wrap="square" rtlCol="0" anchor="ctr"/>
+          <a:lstStyle/>
+          <a:p>
+            <a:pPr rtl="1" algn="ctr" indent="0" marL="0">
+              <a:buNone/>
+            </a:pPr>
+            <a:r>
+              <a:rPr lang="he-IL" altLang="en-US" sz="1500" b="1" dirty="0">
+                <a:solidFill>
+                  <a:schemeClr val="accent1"/>
+                </a:solidFill>
+              </a:rPr>
+              <a:t>[תפקיד — למשל: מובילת מוצר]</a:t>
+            </a:r>
+            <a:endParaRPr lang="he-IL" sz="1500" dirty="0"/>
+          </a:p>
+        </p:txBody>
+      </p:sp>
+      <p:sp>
+        <p:nvSpPr>
+          <p:cNvPr id="8" name="Text 5"/>
+          <p:cNvSpPr txBox="1"/>
+          <p:nvPr/>
+        </p:nvSpPr>
+        <p:spPr>
+          <a:xfrm>
+            <a:off x="8396935" y="4526280"/>
+            <a:ext cx="3017520" cy="1005840"/>
+          </a:xfrm>
+          <a:prstGeom prst="rect">
+            <a:avLst/>
+          </a:prstGeom>
+          <a:noFill/>
+          <a:ln/>
+        </p:spPr>
+        <p:txBody>
+          <a:bodyPr wrap="square" rtlCol="0" anchor="t"/>
+          <a:lstStyle/>
+          <a:p>
+            <a:pPr rtl="1" algn="ctr" indent="0" marL="0">
+              <a:buNone/>
+            </a:pPr>
+            <a:r>
+              <a:rPr lang="he-IL" altLang="en-US" sz="1500" dirty="0">
+                <a:solidFill>
+                  <a:schemeClr val="tx1"/>
+                </a:solidFill>
+              </a:rPr>
+              <a:t>[ניסיון רלוונטי]</a:t>
+            </a:r>
+            <a:endParaRPr lang="he-IL" sz="1500" dirty="0"/>
+          </a:p>
+        </p:txBody>
+      </p:sp>
+      <p:sp>
+        <p:nvSpPr>
+          <p:cNvPr id="9" name="team card 2"/>
+          <p:cNvSpPr/>
+          <p:nvPr/>
+        </p:nvSpPr>
+        <p:spPr>
+          <a:xfrm>
+            <a:off x="4364431" y="1554480"/>
+            <a:ext cx="3474720" cy="4206240"/>
+          </a:xfrm>
+          <a:prstGeom prst="roundRect">
+            <a:avLst>
+              <a:gd name="adj" fmla="val 3158"/>
+            </a:avLst>
+          </a:prstGeom>
+          <a:solidFill>
+            <a:schemeClr val="bg2"/>
+          </a:solidFill>
+          <a:ln w="12700">
+            <a:solidFill>
+              <a:schemeClr val="bg2"/>
+            </a:solidFill>
+            <a:prstDash val="solid"/>
+          </a:ln>
+        </p:spPr>
+      </p:sp>
+      <p:sp>
+        <p:nvSpPr>
+          <p:cNvPr id="10" name="חבר/ת צוות 2 circle"/>
+          <p:cNvSpPr/>
+          <p:nvPr/>
+        </p:nvSpPr>
+        <p:spPr>
+          <a:xfrm>
+            <a:off x="5415991" y="1920240"/>
+            <a:ext cx="1371600" cy="1371600"/>
+          </a:xfrm>
+          <a:prstGeom prst="ellipse">
+            <a:avLst/>
+          </a:prstGeom>
+          <a:solidFill>
+            <a:schemeClr val="tx2"/>
+          </a:solidFill>
+          <a:ln w="12700">
+            <a:solidFill>
+              <a:schemeClr val="tx2"/>
+            </a:solidFill>
+            <a:prstDash val="solid"/>
+          </a:ln>
+        </p:spPr>
+      </p:sp>
+      <p:pic>
+        <p:nvPicPr>
+          <p:cNvPr id="11" name="חבר/ת צוות 2 icon" descr="חבר/ת צוות 2">    </p:cNvPr>
+          <p:cNvPicPr>
+            <a:picLocks noChangeAspect="1"/>
+          </p:cNvPicPr>
+          <p:nvPr/>
+        </p:nvPicPr>
+        <p:blipFill>
+          <a:blip r:embed="rId2"/>
+          <a:stretch>
+            <a:fillRect/>
+          </a:stretch>
+        </p:blipFill>
+        <p:spPr>
+          <a:xfrm>
+            <a:off x="5758891" y="2263140"/>
+            <a:ext cx="685800" cy="685800"/>
+          </a:xfrm>
+          <a:prstGeom prst="rect">
+            <a:avLst/>
+          </a:prstGeom>
+        </p:spPr>
+      </p:pic>
+      <p:sp>
+        <p:nvSpPr>
+          <p:cNvPr id="12" name="Text 8"/>
+          <p:cNvSpPr txBox="1"/>
+          <p:nvPr/>
+        </p:nvSpPr>
+        <p:spPr>
+          <a:xfrm>
+            <a:off x="4593031" y="3474720"/>
+            <a:ext cx="3017520" cy="502920"/>
+          </a:xfrm>
+          <a:prstGeom prst="rect">
+            <a:avLst/>
+          </a:prstGeom>
+          <a:noFill/>
+          <a:ln/>
+        </p:spPr>
+        <p:txBody>
+          <a:bodyPr wrap="square" rtlCol="0" anchor="ctr"/>
+          <a:lstStyle/>
+          <a:p>
+            <a:pPr rtl="1" algn="ctr" indent="0" marL="0">
+              <a:buNone/>
+            </a:pPr>
+            <a:r>
+              <a:rPr lang="he-IL" altLang="en-US" sz="2200" b="1" dirty="0">
+                <a:solidFill>
+                  <a:schemeClr val="tx2"/>
+                </a:solidFill>
+              </a:rPr>
+              <a:t>[שם מלא]</a:t>
+            </a:r>
+            <a:endParaRPr lang="he-IL" sz="2200" dirty="0"/>
+          </a:p>
+        </p:txBody>
+      </p:sp>
+      <p:sp>
+        <p:nvSpPr>
+          <p:cNvPr id="13" name="Text 9"/>
+          <p:cNvSpPr txBox="1"/>
+          <p:nvPr/>
+        </p:nvSpPr>
+        <p:spPr>
+          <a:xfrm>
+            <a:off x="4593031" y="4023360"/>
+            <a:ext cx="3017520" cy="457200"/>
+          </a:xfrm>
+          <a:prstGeom prst="rect">
+            <a:avLst/>
+          </a:prstGeom>
+          <a:noFill/>
+          <a:ln/>
+        </p:spPr>
+        <p:txBody>
+          <a:bodyPr wrap="square" rtlCol="0" anchor="ctr"/>
+          <a:lstStyle/>
+          <a:p>
+            <a:pPr rtl="1" algn="ctr" indent="0" marL="0">
+              <a:buNone/>
+            </a:pPr>
+            <a:r>
+              <a:rPr lang="he-IL" altLang="en-US" sz="1500" b="1" dirty="0">
+                <a:solidFill>
+                  <a:schemeClr val="accent1"/>
+                </a:solidFill>
+              </a:rPr>
+              <a:t>[תפקיד — למשל: Data / AI]</a:t>
+            </a:r>
+            <a:endParaRPr lang="he-IL" sz="1500" dirty="0"/>
+          </a:p>
+        </p:txBody>
+      </p:sp>
+      <p:sp>
+        <p:nvSpPr>
+          <p:cNvPr id="14" name="Text 10"/>
+          <p:cNvSpPr txBox="1"/>
+          <p:nvPr/>
+        </p:nvSpPr>
+        <p:spPr>
+          <a:xfrm>
+            <a:off x="4593031" y="4526280"/>
+            <a:ext cx="3017520" cy="1005840"/>
+          </a:xfrm>
+          <a:prstGeom prst="rect">
+            <a:avLst/>
+          </a:prstGeom>
+          <a:noFill/>
+          <a:ln/>
+        </p:spPr>
+        <p:txBody>
+          <a:bodyPr wrap="square" rtlCol="0" anchor="t"/>
+          <a:lstStyle/>
+          <a:p>
+            <a:pPr rtl="1" algn="ctr" indent="0" marL="0">
+              <a:buNone/>
+            </a:pPr>
+            <a:r>
+              <a:rPr lang="he-IL" altLang="en-US" sz="1500" dirty="0">
+                <a:solidFill>
+                  <a:schemeClr val="tx1"/>
+                </a:solidFill>
+              </a:rPr>
+              <a:t>[ניסיון רלוונטי]</a:t>
+            </a:r>
+            <a:endParaRPr lang="he-IL" sz="1500" dirty="0"/>
+          </a:p>
+        </p:txBody>
+      </p:sp>
+      <p:sp>
+        <p:nvSpPr>
+          <p:cNvPr id="15" name="team card 3"/>
+          <p:cNvSpPr/>
+          <p:nvPr/>
+        </p:nvSpPr>
+        <p:spPr>
+          <a:xfrm>
+            <a:off x="560527" y="1554480"/>
+            <a:ext cx="3474720" cy="4206240"/>
+          </a:xfrm>
+          <a:prstGeom prst="roundRect">
+            <a:avLst>
+              <a:gd name="adj" fmla="val 3158"/>
+            </a:avLst>
+          </a:prstGeom>
+          <a:solidFill>
+            <a:schemeClr val="bg2"/>
+          </a:solidFill>
+          <a:ln w="12700">
+            <a:solidFill>
+              <a:schemeClr val="bg2"/>
+            </a:solidFill>
+            <a:prstDash val="solid"/>
+          </a:ln>
+        </p:spPr>
+      </p:sp>
+      <p:sp>
+        <p:nvSpPr>
+          <p:cNvPr id="16" name="חבר/ת צוות 3 circle"/>
+          <p:cNvSpPr/>
+          <p:nvPr/>
+        </p:nvSpPr>
+        <p:spPr>
+          <a:xfrm>
+            <a:off x="1612087" y="1920240"/>
+            <a:ext cx="1371600" cy="1371600"/>
+          </a:xfrm>
+          <a:prstGeom prst="ellipse">
+            <a:avLst/>
+          </a:prstGeom>
+          <a:solidFill>
+            <a:schemeClr val="tx2"/>
+          </a:solidFill>
+          <a:ln w="12700">
+            <a:solidFill>
+              <a:schemeClr val="tx2"/>
+            </a:solidFill>
+            <a:prstDash val="solid"/>
+          </a:ln>
+        </p:spPr>
+      </p:sp>
+      <p:pic>
+        <p:nvPicPr>
+          <p:cNvPr id="17" name="חבר/ת צוות 3 icon" descr="חבר/ת צוות 3">    </p:cNvPr>
+          <p:cNvPicPr>
+            <a:picLocks noChangeAspect="1"/>
+          </p:cNvPicPr>
+          <p:nvPr/>
+        </p:nvPicPr>
+        <p:blipFill>
+          <a:blip r:embed="rId3"/>
+          <a:stretch>
+            <a:fillRect/>
+          </a:stretch>
+        </p:blipFill>
+        <p:spPr>
+          <a:xfrm>
+            <a:off x="1954987" y="2263140"/>
+            <a:ext cx="685800" cy="685800"/>
+          </a:xfrm>
+          <a:prstGeom prst="rect">
+            <a:avLst/>
+          </a:prstGeom>
+        </p:spPr>
+      </p:pic>
+      <p:sp>
+        <p:nvSpPr>
+          <p:cNvPr id="18" name="Text 13"/>
+          <p:cNvSpPr txBox="1"/>
+          <p:nvPr/>
+        </p:nvSpPr>
+        <p:spPr>
+          <a:xfrm>
+            <a:off x="789127" y="3474720"/>
+            <a:ext cx="3017520" cy="502920"/>
+          </a:xfrm>
+          <a:prstGeom prst="rect">
+            <a:avLst/>
+          </a:prstGeom>
+          <a:noFill/>
+          <a:ln/>
+        </p:spPr>
+        <p:txBody>
+          <a:bodyPr wrap="square" rtlCol="0" anchor="ctr"/>
+          <a:lstStyle/>
+          <a:p>
+            <a:pPr rtl="1" algn="ctr" indent="0" marL="0">
+              <a:buNone/>
+            </a:pPr>
+            <a:r>
+              <a:rPr lang="he-IL" altLang="en-US" sz="2200" b="1" dirty="0">
+                <a:solidFill>
+                  <a:schemeClr val="tx2"/>
+                </a:solidFill>
+              </a:rPr>
+              <a:t>[שם מלא]</a:t>
+            </a:r>
+            <a:endParaRPr lang="he-IL" sz="2200" dirty="0"/>
+          </a:p>
+        </p:txBody>
+      </p:sp>
+      <p:sp>
+        <p:nvSpPr>
+          <p:cNvPr id="19" name="Text 14"/>
+          <p:cNvSpPr txBox="1"/>
+          <p:nvPr/>
+        </p:nvSpPr>
+        <p:spPr>
+          <a:xfrm>
+            <a:off x="789127" y="4023360"/>
+            <a:ext cx="3017520" cy="457200"/>
+          </a:xfrm>
+          <a:prstGeom prst="rect">
+            <a:avLst/>
+          </a:prstGeom>
+          <a:noFill/>
+          <a:ln/>
+        </p:spPr>
+        <p:txBody>
+          <a:bodyPr wrap="square" rtlCol="0" anchor="ctr"/>
+          <a:lstStyle/>
+          <a:p>
+            <a:pPr rtl="1" algn="ctr" indent="0" marL="0">
+              <a:buNone/>
+            </a:pPr>
+            <a:r>
+              <a:rPr lang="he-IL" altLang="en-US" sz="1500" b="1" dirty="0">
+                <a:solidFill>
+                  <a:schemeClr val="accent1"/>
+                </a:solidFill>
+              </a:rPr>
+              <a:t>[תפקיד — למשל: פיתוח]</a:t>
+            </a:r>
+            <a:endParaRPr lang="he-IL" sz="1500" dirty="0"/>
+          </a:p>
+        </p:txBody>
+      </p:sp>
+      <p:sp>
+        <p:nvSpPr>
+          <p:cNvPr id="20" name="Text 15"/>
+          <p:cNvSpPr txBox="1"/>
+          <p:nvPr/>
+        </p:nvSpPr>
+        <p:spPr>
+          <a:xfrm>
+            <a:off x="789127" y="4526280"/>
+            <a:ext cx="3017520" cy="1005840"/>
+          </a:xfrm>
+          <a:prstGeom prst="rect">
+            <a:avLst/>
+          </a:prstGeom>
+          <a:noFill/>
+          <a:ln/>
+        </p:spPr>
+        <p:txBody>
+          <a:bodyPr wrap="square" rtlCol="0" anchor="t"/>
+          <a:lstStyle/>
+          <a:p>
+            <a:pPr rtl="1" algn="ctr" indent="0" marL="0">
+              <a:buNone/>
+            </a:pPr>
+            <a:r>
+              <a:rPr lang="he-IL" altLang="en-US" sz="1500" dirty="0">
+                <a:solidFill>
+                  <a:schemeClr val="tx1"/>
+                </a:solidFill>
+              </a:rPr>
+              <a:t>[ניסיון רלוונטי]</a:t>
+            </a:r>
+            <a:endParaRPr lang="he-IL" sz="1500" dirty="0"/>
+          </a:p>
+        </p:txBody>
+      </p:sp>
+      <p:sp>
+        <p:nvSpPr>
+          <p:cNvPr id="25" name="Slide Number Placeholder 0"/>
+          <p:cNvSpPr>
+            <a:spLocks noGrp="1"/>
+          </p:cNvSpPr>
+          <p:nvPr>
+            <p:ph type="sldNum" sz="quarter" idx="4294967295"/>
+          </p:nvPr>
+        </p:nvSpPr>
+        <p:spPr>
+          <a:xfrm>
+            <a:off x="548640" y="6400800"/>
+            <a:ext cx="548640" cy="274320"/>
+          </a:xfrm>
+          <a:prstGeom prst="rect">
+            <a:avLst/>
+          </a:prstGeom>
+          <a:extLst>
+            <a:ext uri="{C572A759-6A51-4108-AA02-DFA0A04FC94B}">
+              <ma14:wrappingTextBoxFlag xmlns:ma14="http://schemas.microsoft.com/office/mac/drawingml/2011/main" val="0"/>
+            </a:ext>
+          </a:extLst>
+        </p:spPr>
+        <p:txBody>
+          <a:bodyPr/>
+          <a:lstStyle>
+            <a:lvl1pPr>
+              <a:defRPr sz="1000">
+                <a:solidFill>
+                  <a:schemeClr val="accent4"/>
+                </a:solidFill>
+              </a:defRPr>
+            </a:lvl1pPr>
+          </a:lstStyle>
+          <a:p>
+            <a:pPr algn="l"/>
+            <a:fld id="{F7021451-1387-4CA6-816F-3879F97B5CBC}" type="slidenum">
+              <a:rPr b="0" lang="en-US"/>
+              <a:t>14</a:t>
+            </a:fld>
+            <a:endParaRPr lang="en-US"/>
+          </a:p>
+        </p:txBody>
+      </p:sp>
+    </p:spTree>
+  </p:cSld>
+  <p:clrMapOvr>
+    <a:masterClrMapping/>
+  </p:clrMapOvr>
+</p:sld>
+</file>
+
+<file path=ppt/slides/slide15.xml><?xml version="1.0" encoding="utf-8"?>
+<p:sld xmlns:a="http://schemas.openxmlformats.org/drawingml/2006/main" xmlns:r="http://schemas.openxmlformats.org/officeDocument/2006/relationships" xmlns:p="http://schemas.openxmlformats.org/presentationml/2006/main">
+  <p:cSld name="Slide 15">
+    <p:spTree>
+      <p:nvGrpSpPr>
+        <p:cNvPr id="1" name=""/>
+        <p:cNvGrpSpPr/>
+        <p:nvPr/>
+      </p:nvGrpSpPr>
+      <p:grpSpPr>
+        <a:xfrm>
+          <a:off x="0" y="0"/>
+          <a:ext cx="0" cy="0"/>
+          <a:chOff x="0" y="0"/>
+          <a:chExt cx="0" cy="0"/>
+        </a:xfrm>
+      </p:grpSpPr>
+      <p:sp>
+        <p:nvSpPr>
+          <p:cNvPr id="2" name="Text 0"/>
           <p:cNvSpPr txBox="1"/>
           <p:nvPr/>
         </p:nvSpPr>
@@ -4989,7 +7521,7 @@
                   <a:schemeClr val="bg1"/>
                 </a:solidFill>
               </a:rPr>
-              <a:t>סביבת watsonx, Apptio ו-Turbonomic לפיתוח</a:t>
+              <a:t>IBM Bob, watsonx Orchestrate ו-watsonx.data intelligence</a:t>
             </a:r>
             <a:endParaRPr lang="he-IL" sz="1500" dirty="0"/>
           </a:p>
@@ -8453,7 +10985,7 @@
                   <a:schemeClr val="tx1"/>
                 </a:solidFill>
               </a:rPr>
-              <a:t>HR, ITSM, רכש ורישיונות, ענן ומוני חשמל</a:t>
+              <a:t>קטלוג נתונים אחד לעובדים, תמיכה, רישיונות, ענן וחשמל</a:t>
             </a:r>
             <a:endParaRPr lang="he-IL" sz="1500" dirty="0"/>
           </a:p>
@@ -8636,7 +11168,7 @@
                   <a:schemeClr val="tx1"/>
                 </a:solidFill>
               </a:rPr>
-              <a:t>AI מאתר כפילויות, חוסר ניצול ובזבוז</a:t>
+              <a:t>סוכני AI מאתרים כפילויות, חוסר ניצול ובזבוז</a:t>
             </a:r>
             <a:endParaRPr lang="he-IL" sz="1500" dirty="0"/>
           </a:p>
